--- a/public/lessons/year-6-maths/spring/week-19/solve-multi-step-proportion-problems/teaching-powerpoint-v1.pptx
+++ b/public/lessons/year-6-maths/spring/week-19/solve-multi-step-proportion-problems/teaching-powerpoint-v1.pptx
@@ -2,24 +2,24 @@
 <file path=ppt/presentation.xml><?xml version="1.0" encoding="utf-8"?>
 <p:presentation xmlns:p="http://schemas.openxmlformats.org/presentationml/2006/main">
   <p:sldMasterIdLst>
-    <p:sldMasterId xmlns:r="http://schemas.openxmlformats.org/officeDocument/2006/relationships" id="2147483648" r:id="Racf130c872a54c90"/>
+    <p:sldMasterId xmlns:r="http://schemas.openxmlformats.org/officeDocument/2006/relationships" id="2147483648" r:id="R9ca04af83f6a4042"/>
   </p:sldMasterIdLst>
   <p:notesMasterIdLst>
-    <p:notesMasterId xmlns:r="http://schemas.openxmlformats.org/officeDocument/2006/relationships" r:id="R507f6eba879d4188"/>
+    <p:notesMasterId xmlns:r="http://schemas.openxmlformats.org/officeDocument/2006/relationships" r:id="Rc6d785b59cbd43ce"/>
   </p:notesMasterIdLst>
   <p:sldIdLst>
-    <p:sldId xmlns:r="http://schemas.openxmlformats.org/officeDocument/2006/relationships" id="256" r:id="R769c084eafa04a7a"/>
-    <p:sldId xmlns:r="http://schemas.openxmlformats.org/officeDocument/2006/relationships" id="257" r:id="R2cff5ee964ec40eb"/>
-    <p:sldId xmlns:r="http://schemas.openxmlformats.org/officeDocument/2006/relationships" id="258" r:id="Rbd1f62c1f1374310"/>
-    <p:sldId xmlns:r="http://schemas.openxmlformats.org/officeDocument/2006/relationships" id="259" r:id="R5d1ea73726754d8f"/>
-    <p:sldId xmlns:r="http://schemas.openxmlformats.org/officeDocument/2006/relationships" id="260" r:id="R799660ad82604d8d"/>
-    <p:sldId xmlns:r="http://schemas.openxmlformats.org/officeDocument/2006/relationships" id="261" r:id="Rc23d3fe664084f29"/>
-    <p:sldId xmlns:r="http://schemas.openxmlformats.org/officeDocument/2006/relationships" id="262" r:id="Rf4122920050142ba"/>
-    <p:sldId xmlns:r="http://schemas.openxmlformats.org/officeDocument/2006/relationships" id="263" r:id="R66fcc75433094b5d"/>
-    <p:sldId xmlns:r="http://schemas.openxmlformats.org/officeDocument/2006/relationships" id="264" r:id="R4e6e6a3321f74c3a"/>
-    <p:sldId xmlns:r="http://schemas.openxmlformats.org/officeDocument/2006/relationships" id="265" r:id="Rcb06eb01c0a84efe"/>
-    <p:sldId xmlns:r="http://schemas.openxmlformats.org/officeDocument/2006/relationships" id="266" r:id="R17bd83b93ee2474c"/>
-    <p:sldId xmlns:r="http://schemas.openxmlformats.org/officeDocument/2006/relationships" id="267" r:id="R23e578d65d2542ca"/>
+    <p:sldId xmlns:r="http://schemas.openxmlformats.org/officeDocument/2006/relationships" id="256" r:id="R2540d93a0e1346f8"/>
+    <p:sldId xmlns:r="http://schemas.openxmlformats.org/officeDocument/2006/relationships" id="257" r:id="R201e1d793b764923"/>
+    <p:sldId xmlns:r="http://schemas.openxmlformats.org/officeDocument/2006/relationships" id="258" r:id="Re4178c8cd5d74b4e"/>
+    <p:sldId xmlns:r="http://schemas.openxmlformats.org/officeDocument/2006/relationships" id="259" r:id="R102f185d4d2740e1"/>
+    <p:sldId xmlns:r="http://schemas.openxmlformats.org/officeDocument/2006/relationships" id="260" r:id="Ra218609af08f4e9c"/>
+    <p:sldId xmlns:r="http://schemas.openxmlformats.org/officeDocument/2006/relationships" id="261" r:id="R4b98b1f25d00427b"/>
+    <p:sldId xmlns:r="http://schemas.openxmlformats.org/officeDocument/2006/relationships" id="262" r:id="Rec2758441e25422b"/>
+    <p:sldId xmlns:r="http://schemas.openxmlformats.org/officeDocument/2006/relationships" id="263" r:id="R956cb3022c1346cf"/>
+    <p:sldId xmlns:r="http://schemas.openxmlformats.org/officeDocument/2006/relationships" id="264" r:id="R1af702db68de417e"/>
+    <p:sldId xmlns:r="http://schemas.openxmlformats.org/officeDocument/2006/relationships" id="265" r:id="R9e1fff75f42e4d5d"/>
+    <p:sldId xmlns:r="http://schemas.openxmlformats.org/officeDocument/2006/relationships" id="266" r:id="Rb71a936773d3405a"/>
+    <p:sldId xmlns:r="http://schemas.openxmlformats.org/officeDocument/2006/relationships" id="267" r:id="R993e394287e74687"/>
   </p:sldIdLst>
   <p:sldSz cx="12192000" cy="6858000"/>
   <p:notesSz cx="6858000" cy="9144000"/>
@@ -873,7 +873,7 @@
           <a:lstStyle xmlns:a="http://schemas.openxmlformats.org/drawingml/2006/main"/>
           <a:p xmlns:a="http://schemas.openxmlformats.org/drawingml/2006/main">
             <a:r>
-              <a:t>I do. Reveal the question, setup and each calculation stage one click at a time. Pupils watch before copying. Model answer: 52 km.</a:t>
+              <a:t>I do. Reveal the question, then reveal each mathematical change one click at a time. Point to the numbers and operation that changed before moving to the next line. Final answer: 52 km.</a:t>
             </a:r>
           </a:p>
         </p:txBody>
@@ -1291,7 +1291,7 @@
   </p:cSld>
   <p:clrMap bg1="lt1" tx1="dk1" bg2="lt2" tx2="dk2" accent1="accent1" accent2="accent2" accent3="accent3" accent4="accent4" accent5="accent5" accent6="accent6" hlink="hlink" folHlink="folHlink"/>
   <p:sldLayoutIdLst>
-    <p:sldLayoutId xmlns:r="http://schemas.openxmlformats.org/officeDocument/2006/relationships" id="2147483649" r:id="Rb9e3cb3750574957"/>
+    <p:sldLayoutId xmlns:r="http://schemas.openxmlformats.org/officeDocument/2006/relationships" id="2147483649" r:id="R4899dccebc444ee7"/>
   </p:sldLayoutIdLst>
   <p:txStyles>
     <p:titleStyle>
@@ -1842,7 +1842,7 @@
           <p:cNvPr id="12" name="">
             <a:extLst xmlns:a="http://schemas.openxmlformats.org/drawingml/2006/main">
               <a:ext uri="{FF2B5EF4-FFF2-40B4-BE49-F238E27FC236}">
-                <a16:creationId xmlns:a16="http://schemas.microsoft.com/office/drawing/2014/main" id="{11C4180D-14EE-49C8-9E62-BEE53A619476}"/>
+                <a16:creationId xmlns:a16="http://schemas.microsoft.com/office/drawing/2014/main" id="{EDA6ECCD-683C-4D3D-B297-D2BDA3D52BEF}"/>
               </a:ext>
             </a:extLst>
           </p:cNvPr>
@@ -1874,7 +1874,7 @@
           <p:cNvPr id="2" name="">
             <a:extLst xmlns:a="http://schemas.openxmlformats.org/drawingml/2006/main">
               <a:ext uri="{FF2B5EF4-FFF2-40B4-BE49-F238E27FC236}">
-                <a16:creationId xmlns:a16="http://schemas.microsoft.com/office/drawing/2014/main" id="{6EA2471D-50A5-4A35-ABA4-5E10D7E99E7E}"/>
+                <a16:creationId xmlns:a16="http://schemas.microsoft.com/office/drawing/2014/main" id="{D8B4CA5C-5183-410B-B489-D1603AA6694F}"/>
               </a:ext>
             </a:extLst>
           </p:cNvPr>
@@ -1931,7 +1931,7 @@
           <p:cNvPr id="3" name="">
             <a:extLst xmlns:a="http://schemas.openxmlformats.org/drawingml/2006/main">
               <a:ext uri="{FF2B5EF4-FFF2-40B4-BE49-F238E27FC236}">
-                <a16:creationId xmlns:a16="http://schemas.microsoft.com/office/drawing/2014/main" id="{AA6F6242-FBE2-45EF-B37A-85F428D5C68C}"/>
+                <a16:creationId xmlns:a16="http://schemas.microsoft.com/office/drawing/2014/main" id="{26EFCA50-ABEA-4B63-B1F8-400FAED4D030}"/>
               </a:ext>
             </a:extLst>
           </p:cNvPr>
@@ -1965,7 +1965,7 @@
           <p:cNvPr id="4" name="">
             <a:extLst xmlns:a="http://schemas.openxmlformats.org/drawingml/2006/main">
               <a:ext uri="{FF2B5EF4-FFF2-40B4-BE49-F238E27FC236}">
-                <a16:creationId xmlns:a16="http://schemas.microsoft.com/office/drawing/2014/main" id="{D5A87729-70F7-47D2-87BF-0877C0CA7793}"/>
+                <a16:creationId xmlns:a16="http://schemas.microsoft.com/office/drawing/2014/main" id="{6B45ACE6-6452-4629-B36E-40862BD01FD2}"/>
               </a:ext>
             </a:extLst>
           </p:cNvPr>
@@ -2022,7 +2022,7 @@
           <p:cNvPr id="5" name="">
             <a:extLst xmlns:a="http://schemas.openxmlformats.org/drawingml/2006/main">
               <a:ext uri="{FF2B5EF4-FFF2-40B4-BE49-F238E27FC236}">
-                <a16:creationId xmlns:a16="http://schemas.microsoft.com/office/drawing/2014/main" id="{4F857590-A001-4F2E-8B0C-F6F916FE57A4}"/>
+                <a16:creationId xmlns:a16="http://schemas.microsoft.com/office/drawing/2014/main" id="{9E5B523E-EA42-484E-A51B-323FD7DC8D63}"/>
               </a:ext>
             </a:extLst>
           </p:cNvPr>
@@ -2079,7 +2079,7 @@
           <p:cNvPr id="6" name="">
             <a:extLst xmlns:a="http://schemas.openxmlformats.org/drawingml/2006/main">
               <a:ext uri="{FF2B5EF4-FFF2-40B4-BE49-F238E27FC236}">
-                <a16:creationId xmlns:a16="http://schemas.microsoft.com/office/drawing/2014/main" id="{8B8E2ED4-9578-4C06-82DA-A837ABDD717C}"/>
+                <a16:creationId xmlns:a16="http://schemas.microsoft.com/office/drawing/2014/main" id="{74F7270A-1B66-44DE-8F90-B279E6074089}"/>
               </a:ext>
             </a:extLst>
           </p:cNvPr>
@@ -2113,7 +2113,7 @@
           <p:cNvPr id="7" name="">
             <a:extLst xmlns:a="http://schemas.openxmlformats.org/drawingml/2006/main">
               <a:ext uri="{FF2B5EF4-FFF2-40B4-BE49-F238E27FC236}">
-                <a16:creationId xmlns:a16="http://schemas.microsoft.com/office/drawing/2014/main" id="{CB434A9B-DF7A-4973-829D-8BC1255658F4}"/>
+                <a16:creationId xmlns:a16="http://schemas.microsoft.com/office/drawing/2014/main" id="{14400802-F7BC-4366-84E7-DD6A2F99A772}"/>
               </a:ext>
             </a:extLst>
           </p:cNvPr>
@@ -2170,7 +2170,7 @@
           <p:cNvPr id="8" name="">
             <a:extLst xmlns:a="http://schemas.openxmlformats.org/drawingml/2006/main">
               <a:ext uri="{FF2B5EF4-FFF2-40B4-BE49-F238E27FC236}">
-                <a16:creationId xmlns:a16="http://schemas.microsoft.com/office/drawing/2014/main" id="{A9B3D23B-17C6-41C0-BE3D-8BA1E7122CBC}"/>
+                <a16:creationId xmlns:a16="http://schemas.microsoft.com/office/drawing/2014/main" id="{69577EF0-492E-4E34-899F-EEB665444FED}"/>
               </a:ext>
             </a:extLst>
           </p:cNvPr>
@@ -2227,7 +2227,7 @@
           <p:cNvPr id="9" name="">
             <a:extLst xmlns:a="http://schemas.openxmlformats.org/drawingml/2006/main">
               <a:ext uri="{FF2B5EF4-FFF2-40B4-BE49-F238E27FC236}">
-                <a16:creationId xmlns:a16="http://schemas.microsoft.com/office/drawing/2014/main" id="{FC4B3521-D385-43B5-B3E7-C9980D00A2DD}"/>
+                <a16:creationId xmlns:a16="http://schemas.microsoft.com/office/drawing/2014/main" id="{8707637C-0849-4321-AE2D-A149ECF5DB37}"/>
               </a:ext>
             </a:extLst>
           </p:cNvPr>
@@ -2284,7 +2284,7 @@
           <p:cNvPr id="10" name="">
             <a:extLst xmlns:a="http://schemas.openxmlformats.org/drawingml/2006/main">
               <a:ext uri="{FF2B5EF4-FFF2-40B4-BE49-F238E27FC236}">
-                <a16:creationId xmlns:a16="http://schemas.microsoft.com/office/drawing/2014/main" id="{75A5FAEE-9728-4619-9892-AD870727F35F}"/>
+                <a16:creationId xmlns:a16="http://schemas.microsoft.com/office/drawing/2014/main" id="{A4CC027B-C062-4C01-9237-BEE6AA2D0A94}"/>
               </a:ext>
             </a:extLst>
           </p:cNvPr>
@@ -2341,7 +2341,7 @@
           <p:cNvPr id="11" name="">
             <a:extLst xmlns:a="http://schemas.openxmlformats.org/drawingml/2006/main">
               <a:ext uri="{FF2B5EF4-FFF2-40B4-BE49-F238E27FC236}">
-                <a16:creationId xmlns:a16="http://schemas.microsoft.com/office/drawing/2014/main" id="{4BDB973F-4DBE-4A1F-A040-B7E97464C7F8}"/>
+                <a16:creationId xmlns:a16="http://schemas.microsoft.com/office/drawing/2014/main" id="{8DE44F9C-B32F-4B40-9874-565F16B78CE6}"/>
               </a:ext>
             </a:extLst>
           </p:cNvPr>
@@ -2396,7 +2396,7 @@
     </p:spTree>
     <p:extLst>
       <p:ext uri="{BB962C8B-B14F-4D97-AF65-F5344CB8AC3E}">
-        <p14:creationId xmlns:p14="http://schemas.microsoft.com/office/powerpoint/2010/main" val="710747661"/>
+        <p14:creationId xmlns:p14="http://schemas.microsoft.com/office/powerpoint/2010/main" val="2039179611"/>
       </p:ext>
     </p:extLst>
   </p:cSld>
@@ -2427,7 +2427,7 @@
           <p:cNvPr id="14" name="">
             <a:extLst xmlns:a="http://schemas.openxmlformats.org/drawingml/2006/main">
               <a:ext uri="{FF2B5EF4-FFF2-40B4-BE49-F238E27FC236}">
-                <a16:creationId xmlns:a16="http://schemas.microsoft.com/office/drawing/2014/main" id="{2784A987-39B3-49FC-933A-7C736CCF5C90}"/>
+                <a16:creationId xmlns:a16="http://schemas.microsoft.com/office/drawing/2014/main" id="{9DA979D5-6EBC-4A49-A032-4678DCC28770}"/>
               </a:ext>
             </a:extLst>
           </p:cNvPr>
@@ -2459,7 +2459,7 @@
           <p:cNvPr id="2" name="">
             <a:extLst xmlns:a="http://schemas.openxmlformats.org/drawingml/2006/main">
               <a:ext uri="{FF2B5EF4-FFF2-40B4-BE49-F238E27FC236}">
-                <a16:creationId xmlns:a16="http://schemas.microsoft.com/office/drawing/2014/main" id="{F17ACC44-E982-4218-BBC9-99DF4E27F96B}"/>
+                <a16:creationId xmlns:a16="http://schemas.microsoft.com/office/drawing/2014/main" id="{02FC5715-BF0B-42FB-8653-C808A110D120}"/>
               </a:ext>
             </a:extLst>
           </p:cNvPr>
@@ -2516,7 +2516,7 @@
           <p:cNvPr id="3" name="">
             <a:extLst xmlns:a="http://schemas.openxmlformats.org/drawingml/2006/main">
               <a:ext uri="{FF2B5EF4-FFF2-40B4-BE49-F238E27FC236}">
-                <a16:creationId xmlns:a16="http://schemas.microsoft.com/office/drawing/2014/main" id="{D5D05AF7-468D-4FE7-8F16-891F60C5B6C6}"/>
+                <a16:creationId xmlns:a16="http://schemas.microsoft.com/office/drawing/2014/main" id="{E942934A-4327-409D-A98E-EAEF6155C5BA}"/>
               </a:ext>
             </a:extLst>
           </p:cNvPr>
@@ -2548,7 +2548,7 @@
           <p:cNvPr id="4" name="">
             <a:extLst xmlns:a="http://schemas.openxmlformats.org/drawingml/2006/main">
               <a:ext uri="{FF2B5EF4-FFF2-40B4-BE49-F238E27FC236}">
-                <a16:creationId xmlns:a16="http://schemas.microsoft.com/office/drawing/2014/main" id="{865FBB86-8B2A-4223-AD8D-6B9CEFB134E7}"/>
+                <a16:creationId xmlns:a16="http://schemas.microsoft.com/office/drawing/2014/main" id="{F5F18085-F401-4BFA-A4A6-8E96546DD66A}"/>
               </a:ext>
             </a:extLst>
           </p:cNvPr>
@@ -2605,7 +2605,7 @@
           <p:cNvPr id="5" name="">
             <a:extLst xmlns:a="http://schemas.openxmlformats.org/drawingml/2006/main">
               <a:ext uri="{FF2B5EF4-FFF2-40B4-BE49-F238E27FC236}">
-                <a16:creationId xmlns:a16="http://schemas.microsoft.com/office/drawing/2014/main" id="{AE261154-7C52-44FC-970B-973159A20F37}"/>
+                <a16:creationId xmlns:a16="http://schemas.microsoft.com/office/drawing/2014/main" id="{7E47D3F9-96D2-4219-9218-EAEA9C833B6F}"/>
               </a:ext>
             </a:extLst>
           </p:cNvPr>
@@ -2662,7 +2662,7 @@
           <p:cNvPr id="6" name="">
             <a:extLst xmlns:a="http://schemas.openxmlformats.org/drawingml/2006/main">
               <a:ext uri="{FF2B5EF4-FFF2-40B4-BE49-F238E27FC236}">
-                <a16:creationId xmlns:a16="http://schemas.microsoft.com/office/drawing/2014/main" id="{B30C7B07-6EF9-4150-8068-30A5E4C8936A}"/>
+                <a16:creationId xmlns:a16="http://schemas.microsoft.com/office/drawing/2014/main" id="{DCCA80E0-84B6-4560-9B70-E457C5D0F117}"/>
               </a:ext>
             </a:extLst>
           </p:cNvPr>
@@ -2719,7 +2719,7 @@
           <p:cNvPr id="7" name="">
             <a:extLst xmlns:a="http://schemas.openxmlformats.org/drawingml/2006/main">
               <a:ext uri="{FF2B5EF4-FFF2-40B4-BE49-F238E27FC236}">
-                <a16:creationId xmlns:a16="http://schemas.microsoft.com/office/drawing/2014/main" id="{CDE303DD-5578-48D4-BD17-2886401E0EBA}"/>
+                <a16:creationId xmlns:a16="http://schemas.microsoft.com/office/drawing/2014/main" id="{3676EB95-998C-41AA-879B-A2F773C4B829}"/>
               </a:ext>
             </a:extLst>
           </p:cNvPr>
@@ -2751,7 +2751,7 @@
           <p:cNvPr id="8" name="">
             <a:extLst xmlns:a="http://schemas.openxmlformats.org/drawingml/2006/main">
               <a:ext uri="{FF2B5EF4-FFF2-40B4-BE49-F238E27FC236}">
-                <a16:creationId xmlns:a16="http://schemas.microsoft.com/office/drawing/2014/main" id="{F2269557-48AF-4185-80E7-40FB8DDD6AF9}"/>
+                <a16:creationId xmlns:a16="http://schemas.microsoft.com/office/drawing/2014/main" id="{488B0293-B3DD-47E2-A348-C4E45DE00BC0}"/>
               </a:ext>
             </a:extLst>
           </p:cNvPr>
@@ -2808,7 +2808,7 @@
           <p:cNvPr id="9" name="">
             <a:extLst xmlns:a="http://schemas.openxmlformats.org/drawingml/2006/main">
               <a:ext uri="{FF2B5EF4-FFF2-40B4-BE49-F238E27FC236}">
-                <a16:creationId xmlns:a16="http://schemas.microsoft.com/office/drawing/2014/main" id="{25B7A37F-9430-4E40-8912-305239A48386}"/>
+                <a16:creationId xmlns:a16="http://schemas.microsoft.com/office/drawing/2014/main" id="{AA07E2BE-E53C-4871-BE58-18E809D4C17F}"/>
               </a:ext>
             </a:extLst>
           </p:cNvPr>
@@ -2865,7 +2865,7 @@
           <p:cNvPr id="10" name="">
             <a:extLst xmlns:a="http://schemas.openxmlformats.org/drawingml/2006/main">
               <a:ext uri="{FF2B5EF4-FFF2-40B4-BE49-F238E27FC236}">
-                <a16:creationId xmlns:a16="http://schemas.microsoft.com/office/drawing/2014/main" id="{64803012-0974-4150-83D3-A61550A0DBE6}"/>
+                <a16:creationId xmlns:a16="http://schemas.microsoft.com/office/drawing/2014/main" id="{7BF4FB2A-14EE-45DA-9808-CB1DC4ADED53}"/>
               </a:ext>
             </a:extLst>
           </p:cNvPr>
@@ -2922,7 +2922,7 @@
           <p:cNvPr id="11" name="">
             <a:extLst xmlns:a="http://schemas.openxmlformats.org/drawingml/2006/main">
               <a:ext uri="{FF2B5EF4-FFF2-40B4-BE49-F238E27FC236}">
-                <a16:creationId xmlns:a16="http://schemas.microsoft.com/office/drawing/2014/main" id="{30FC74B7-33F8-45C7-9B1C-EE9A5F91A5E2}"/>
+                <a16:creationId xmlns:a16="http://schemas.microsoft.com/office/drawing/2014/main" id="{837351A4-3E13-441C-B1E8-951445D529E7}"/>
               </a:ext>
             </a:extLst>
           </p:cNvPr>
@@ -2979,7 +2979,7 @@
           <p:cNvPr id="12" name="">
             <a:extLst xmlns:a="http://schemas.openxmlformats.org/drawingml/2006/main">
               <a:ext uri="{FF2B5EF4-FFF2-40B4-BE49-F238E27FC236}">
-                <a16:creationId xmlns:a16="http://schemas.microsoft.com/office/drawing/2014/main" id="{03E0F44E-AE57-427F-B9C6-3C4A2E0CD86A}"/>
+                <a16:creationId xmlns:a16="http://schemas.microsoft.com/office/drawing/2014/main" id="{E4826B56-9A7E-4700-985C-EE3BEE041178}"/>
               </a:ext>
             </a:extLst>
           </p:cNvPr>
@@ -3036,7 +3036,7 @@
           <p:cNvPr id="13" name="">
             <a:extLst xmlns:a="http://schemas.openxmlformats.org/drawingml/2006/main">
               <a:ext uri="{FF2B5EF4-FFF2-40B4-BE49-F238E27FC236}">
-                <a16:creationId xmlns:a16="http://schemas.microsoft.com/office/drawing/2014/main" id="{1BFADF8F-CF4D-4E76-8F69-5AC74C7D0ACA}"/>
+                <a16:creationId xmlns:a16="http://schemas.microsoft.com/office/drawing/2014/main" id="{B231A714-25C1-4188-857D-D976D3E023FF}"/>
               </a:ext>
             </a:extLst>
           </p:cNvPr>
@@ -3091,7 +3091,7 @@
     </p:spTree>
     <p:extLst>
       <p:ext uri="{BB962C8B-B14F-4D97-AF65-F5344CB8AC3E}">
-        <p14:creationId xmlns:p14="http://schemas.microsoft.com/office/powerpoint/2010/main" val="698448843"/>
+        <p14:creationId xmlns:p14="http://schemas.microsoft.com/office/powerpoint/2010/main" val="1926823411"/>
       </p:ext>
     </p:extLst>
   </p:cSld>
@@ -3292,7 +3292,7 @@
           <p:cNvPr id="19" name="">
             <a:extLst xmlns:a="http://schemas.openxmlformats.org/drawingml/2006/main">
               <a:ext uri="{FF2B5EF4-FFF2-40B4-BE49-F238E27FC236}">
-                <a16:creationId xmlns:a16="http://schemas.microsoft.com/office/drawing/2014/main" id="{F437D3BD-5074-4989-AD24-1E71DCFD7BE4}"/>
+                <a16:creationId xmlns:a16="http://schemas.microsoft.com/office/drawing/2014/main" id="{9CCD7222-2875-4A3D-98EE-B120950CDDE7}"/>
               </a:ext>
             </a:extLst>
           </p:cNvPr>
@@ -3324,7 +3324,7 @@
           <p:cNvPr id="2" name="">
             <a:extLst xmlns:a="http://schemas.openxmlformats.org/drawingml/2006/main">
               <a:ext uri="{FF2B5EF4-FFF2-40B4-BE49-F238E27FC236}">
-                <a16:creationId xmlns:a16="http://schemas.microsoft.com/office/drawing/2014/main" id="{5428C6CC-BC22-424E-919E-22756EEB2DEE}"/>
+                <a16:creationId xmlns:a16="http://schemas.microsoft.com/office/drawing/2014/main" id="{6DF745C8-A5A4-43DE-8296-2047B2053749}"/>
               </a:ext>
             </a:extLst>
           </p:cNvPr>
@@ -3381,7 +3381,7 @@
           <p:cNvPr id="3" name="">
             <a:extLst xmlns:a="http://schemas.openxmlformats.org/drawingml/2006/main">
               <a:ext uri="{FF2B5EF4-FFF2-40B4-BE49-F238E27FC236}">
-                <a16:creationId xmlns:a16="http://schemas.microsoft.com/office/drawing/2014/main" id="{819AF13B-EECA-42B4-906A-4B6BFAC37672}"/>
+                <a16:creationId xmlns:a16="http://schemas.microsoft.com/office/drawing/2014/main" id="{016C9ACF-8687-42F8-91F7-0DED03693D22}"/>
               </a:ext>
             </a:extLst>
           </p:cNvPr>
@@ -3413,7 +3413,7 @@
           <p:cNvPr id="4" name="">
             <a:extLst xmlns:a="http://schemas.openxmlformats.org/drawingml/2006/main">
               <a:ext uri="{FF2B5EF4-FFF2-40B4-BE49-F238E27FC236}">
-                <a16:creationId xmlns:a16="http://schemas.microsoft.com/office/drawing/2014/main" id="{247193D0-9596-4052-821B-6BF4BDC0F9B8}"/>
+                <a16:creationId xmlns:a16="http://schemas.microsoft.com/office/drawing/2014/main" id="{9F667631-3D8C-4372-AC38-120A8380C7A1}"/>
               </a:ext>
             </a:extLst>
           </p:cNvPr>
@@ -3470,7 +3470,7 @@
           <p:cNvPr id="5" name="">
             <a:extLst xmlns:a="http://schemas.openxmlformats.org/drawingml/2006/main">
               <a:ext uri="{FF2B5EF4-FFF2-40B4-BE49-F238E27FC236}">
-                <a16:creationId xmlns:a16="http://schemas.microsoft.com/office/drawing/2014/main" id="{0AC581D0-BAB1-402D-87CE-C23F5E549364}"/>
+                <a16:creationId xmlns:a16="http://schemas.microsoft.com/office/drawing/2014/main" id="{5456ECD2-601B-478C-ADA9-5922122CEE79}"/>
               </a:ext>
             </a:extLst>
           </p:cNvPr>
@@ -3527,7 +3527,7 @@
           <p:cNvPr id="6" name="">
             <a:extLst xmlns:a="http://schemas.openxmlformats.org/drawingml/2006/main">
               <a:ext uri="{FF2B5EF4-FFF2-40B4-BE49-F238E27FC236}">
-                <a16:creationId xmlns:a16="http://schemas.microsoft.com/office/drawing/2014/main" id="{9B123D6A-A067-4686-8EA6-FB8B488CFC8C}"/>
+                <a16:creationId xmlns:a16="http://schemas.microsoft.com/office/drawing/2014/main" id="{6A2D9259-2A00-408D-8B93-99737239E7E4}"/>
               </a:ext>
             </a:extLst>
           </p:cNvPr>
@@ -3584,7 +3584,7 @@
           <p:cNvPr id="7" name="">
             <a:extLst xmlns:a="http://schemas.openxmlformats.org/drawingml/2006/main">
               <a:ext uri="{FF2B5EF4-FFF2-40B4-BE49-F238E27FC236}">
-                <a16:creationId xmlns:a16="http://schemas.microsoft.com/office/drawing/2014/main" id="{2360143C-9DE8-41C8-AC14-B0388F5F5230}"/>
+                <a16:creationId xmlns:a16="http://schemas.microsoft.com/office/drawing/2014/main" id="{D9BBD20C-7F0C-40DD-BC6F-A53631F1F1A8}"/>
               </a:ext>
             </a:extLst>
           </p:cNvPr>
@@ -3616,7 +3616,7 @@
           <p:cNvPr id="8" name="">
             <a:extLst xmlns:a="http://schemas.openxmlformats.org/drawingml/2006/main">
               <a:ext uri="{FF2B5EF4-FFF2-40B4-BE49-F238E27FC236}">
-                <a16:creationId xmlns:a16="http://schemas.microsoft.com/office/drawing/2014/main" id="{127E9DFA-F280-4891-8B87-0FD243D8AA1D}"/>
+                <a16:creationId xmlns:a16="http://schemas.microsoft.com/office/drawing/2014/main" id="{B455B96D-F6B6-40D1-B3AA-D602DACDC182}"/>
               </a:ext>
             </a:extLst>
           </p:cNvPr>
@@ -3673,7 +3673,7 @@
           <p:cNvPr id="9" name="">
             <a:extLst xmlns:a="http://schemas.openxmlformats.org/drawingml/2006/main">
               <a:ext uri="{FF2B5EF4-FFF2-40B4-BE49-F238E27FC236}">
-                <a16:creationId xmlns:a16="http://schemas.microsoft.com/office/drawing/2014/main" id="{9AA1FA32-DECE-4834-97BF-45564A3872B4}"/>
+                <a16:creationId xmlns:a16="http://schemas.microsoft.com/office/drawing/2014/main" id="{170E181A-CDB6-4EE2-9C77-48311568ED2E}"/>
               </a:ext>
             </a:extLst>
           </p:cNvPr>
@@ -3730,7 +3730,7 @@
           <p:cNvPr id="10" name="">
             <a:extLst xmlns:a="http://schemas.openxmlformats.org/drawingml/2006/main">
               <a:ext uri="{FF2B5EF4-FFF2-40B4-BE49-F238E27FC236}">
-                <a16:creationId xmlns:a16="http://schemas.microsoft.com/office/drawing/2014/main" id="{EA3F4D51-E6DF-44AE-ADC1-73A525CCBA50}"/>
+                <a16:creationId xmlns:a16="http://schemas.microsoft.com/office/drawing/2014/main" id="{1AACB6B1-27BC-4040-A172-2E0CB8FB973B}"/>
               </a:ext>
             </a:extLst>
           </p:cNvPr>
@@ -3787,7 +3787,7 @@
           <p:cNvPr id="11" name="">
             <a:extLst xmlns:a="http://schemas.openxmlformats.org/drawingml/2006/main">
               <a:ext uri="{FF2B5EF4-FFF2-40B4-BE49-F238E27FC236}">
-                <a16:creationId xmlns:a16="http://schemas.microsoft.com/office/drawing/2014/main" id="{40A7AE01-923F-4596-8E36-66F588BF1877}"/>
+                <a16:creationId xmlns:a16="http://schemas.microsoft.com/office/drawing/2014/main" id="{783166B2-4910-4E63-B330-913CB22E85D5}"/>
               </a:ext>
             </a:extLst>
           </p:cNvPr>
@@ -3821,7 +3821,7 @@
           <p:cNvPr id="12" name="">
             <a:extLst xmlns:a="http://schemas.openxmlformats.org/drawingml/2006/main">
               <a:ext uri="{FF2B5EF4-FFF2-40B4-BE49-F238E27FC236}">
-                <a16:creationId xmlns:a16="http://schemas.microsoft.com/office/drawing/2014/main" id="{F107EF6D-416B-4B60-A52F-12F64FB449E8}"/>
+                <a16:creationId xmlns:a16="http://schemas.microsoft.com/office/drawing/2014/main" id="{CA3C30CC-0581-48DE-8DE0-83A980C282AA}"/>
               </a:ext>
             </a:extLst>
           </p:cNvPr>
@@ -3878,7 +3878,7 @@
           <p:cNvPr id="13" name="">
             <a:extLst xmlns:a="http://schemas.openxmlformats.org/drawingml/2006/main">
               <a:ext uri="{FF2B5EF4-FFF2-40B4-BE49-F238E27FC236}">
-                <a16:creationId xmlns:a16="http://schemas.microsoft.com/office/drawing/2014/main" id="{81DFCE5B-E290-413D-8889-4070911D68E7}"/>
+                <a16:creationId xmlns:a16="http://schemas.microsoft.com/office/drawing/2014/main" id="{0FB7176C-55A0-4A44-A271-338A9492225F}"/>
               </a:ext>
             </a:extLst>
           </p:cNvPr>
@@ -3935,7 +3935,7 @@
           <p:cNvPr id="14" name="">
             <a:extLst xmlns:a="http://schemas.openxmlformats.org/drawingml/2006/main">
               <a:ext uri="{FF2B5EF4-FFF2-40B4-BE49-F238E27FC236}">
-                <a16:creationId xmlns:a16="http://schemas.microsoft.com/office/drawing/2014/main" id="{5791180C-19DA-4B2C-9000-52F24D18A472}"/>
+                <a16:creationId xmlns:a16="http://schemas.microsoft.com/office/drawing/2014/main" id="{F0A3E73E-AD0E-4788-BEE6-B9DFDC648487}"/>
               </a:ext>
             </a:extLst>
           </p:cNvPr>
@@ -3992,7 +3992,7 @@
           <p:cNvPr id="15" name="">
             <a:extLst xmlns:a="http://schemas.openxmlformats.org/drawingml/2006/main">
               <a:ext uri="{FF2B5EF4-FFF2-40B4-BE49-F238E27FC236}">
-                <a16:creationId xmlns:a16="http://schemas.microsoft.com/office/drawing/2014/main" id="{740CF703-0B1E-4DD0-B7C4-34668B11E201}"/>
+                <a16:creationId xmlns:a16="http://schemas.microsoft.com/office/drawing/2014/main" id="{761C7CC8-B6F6-4136-95A4-373EE67E400E}"/>
               </a:ext>
             </a:extLst>
           </p:cNvPr>
@@ -4026,7 +4026,7 @@
           <p:cNvPr id="16" name="">
             <a:extLst xmlns:a="http://schemas.openxmlformats.org/drawingml/2006/main">
               <a:ext uri="{FF2B5EF4-FFF2-40B4-BE49-F238E27FC236}">
-                <a16:creationId xmlns:a16="http://schemas.microsoft.com/office/drawing/2014/main" id="{6F445381-421A-49CC-B57C-36A10D64D51A}"/>
+                <a16:creationId xmlns:a16="http://schemas.microsoft.com/office/drawing/2014/main" id="{DCF0D171-1BED-4638-B959-802DB16ADB45}"/>
               </a:ext>
             </a:extLst>
           </p:cNvPr>
@@ -4083,7 +4083,7 @@
           <p:cNvPr id="17" name="">
             <a:extLst xmlns:a="http://schemas.openxmlformats.org/drawingml/2006/main">
               <a:ext uri="{FF2B5EF4-FFF2-40B4-BE49-F238E27FC236}">
-                <a16:creationId xmlns:a16="http://schemas.microsoft.com/office/drawing/2014/main" id="{810DA0BB-F87E-495D-BA00-7D2AF9857F84}"/>
+                <a16:creationId xmlns:a16="http://schemas.microsoft.com/office/drawing/2014/main" id="{19BDC969-C150-49FE-A462-1DE867F555FA}"/>
               </a:ext>
             </a:extLst>
           </p:cNvPr>
@@ -4140,7 +4140,7 @@
           <p:cNvPr id="18" name="">
             <a:extLst xmlns:a="http://schemas.openxmlformats.org/drawingml/2006/main">
               <a:ext uri="{FF2B5EF4-FFF2-40B4-BE49-F238E27FC236}">
-                <a16:creationId xmlns:a16="http://schemas.microsoft.com/office/drawing/2014/main" id="{59A38CD9-945D-4300-A013-526EF10437C3}"/>
+                <a16:creationId xmlns:a16="http://schemas.microsoft.com/office/drawing/2014/main" id="{7BCA5194-28AA-4C46-9978-FE9359F799EE}"/>
               </a:ext>
             </a:extLst>
           </p:cNvPr>
@@ -4195,7 +4195,7 @@
     </p:spTree>
     <p:extLst>
       <p:ext uri="{BB962C8B-B14F-4D97-AF65-F5344CB8AC3E}">
-        <p14:creationId xmlns:p14="http://schemas.microsoft.com/office/powerpoint/2010/main" val="1795881957"/>
+        <p14:creationId xmlns:p14="http://schemas.microsoft.com/office/powerpoint/2010/main" val="1321429957"/>
       </p:ext>
     </p:extLst>
   </p:cSld>
@@ -4350,7 +4350,7 @@
           <p:cNvPr id="23" name="">
             <a:extLst xmlns:a="http://schemas.openxmlformats.org/drawingml/2006/main">
               <a:ext uri="{FF2B5EF4-FFF2-40B4-BE49-F238E27FC236}">
-                <a16:creationId xmlns:a16="http://schemas.microsoft.com/office/drawing/2014/main" id="{F79D12D2-5C72-4013-890A-859488932CB6}"/>
+                <a16:creationId xmlns:a16="http://schemas.microsoft.com/office/drawing/2014/main" id="{FF028F7C-AA8E-4113-A23E-C9FAFCB8A984}"/>
               </a:ext>
             </a:extLst>
           </p:cNvPr>
@@ -4382,7 +4382,7 @@
           <p:cNvPr id="2" name="">
             <a:extLst xmlns:a="http://schemas.openxmlformats.org/drawingml/2006/main">
               <a:ext uri="{FF2B5EF4-FFF2-40B4-BE49-F238E27FC236}">
-                <a16:creationId xmlns:a16="http://schemas.microsoft.com/office/drawing/2014/main" id="{1F6761BA-F55B-4A62-B8A4-C04764DE7B32}"/>
+                <a16:creationId xmlns:a16="http://schemas.microsoft.com/office/drawing/2014/main" id="{7576E52F-387D-413C-9696-DC24152E1D54}"/>
               </a:ext>
             </a:extLst>
           </p:cNvPr>
@@ -4439,7 +4439,7 @@
           <p:cNvPr id="3" name="">
             <a:extLst xmlns:a="http://schemas.openxmlformats.org/drawingml/2006/main">
               <a:ext uri="{FF2B5EF4-FFF2-40B4-BE49-F238E27FC236}">
-                <a16:creationId xmlns:a16="http://schemas.microsoft.com/office/drawing/2014/main" id="{61CC988F-1666-4009-9E93-85701E1824C3}"/>
+                <a16:creationId xmlns:a16="http://schemas.microsoft.com/office/drawing/2014/main" id="{F992ABE6-9D1D-4561-974A-6FCD4F240A75}"/>
               </a:ext>
             </a:extLst>
           </p:cNvPr>
@@ -4471,7 +4471,7 @@
           <p:cNvPr id="4" name="">
             <a:extLst xmlns:a="http://schemas.openxmlformats.org/drawingml/2006/main">
               <a:ext uri="{FF2B5EF4-FFF2-40B4-BE49-F238E27FC236}">
-                <a16:creationId xmlns:a16="http://schemas.microsoft.com/office/drawing/2014/main" id="{09C3E94D-5E06-4E08-8584-013A49BDF9D2}"/>
+                <a16:creationId xmlns:a16="http://schemas.microsoft.com/office/drawing/2014/main" id="{CABEE259-7F33-498F-BC50-FD4C5B72DD1C}"/>
               </a:ext>
             </a:extLst>
           </p:cNvPr>
@@ -4528,7 +4528,7 @@
           <p:cNvPr id="5" name="">
             <a:extLst xmlns:a="http://schemas.openxmlformats.org/drawingml/2006/main">
               <a:ext uri="{FF2B5EF4-FFF2-40B4-BE49-F238E27FC236}">
-                <a16:creationId xmlns:a16="http://schemas.microsoft.com/office/drawing/2014/main" id="{CCB59C1A-D143-4EA1-BCA6-62391ABB3FF1}"/>
+                <a16:creationId xmlns:a16="http://schemas.microsoft.com/office/drawing/2014/main" id="{25E46C7E-7D7A-4C98-ACA7-07D1578FD11C}"/>
               </a:ext>
             </a:extLst>
           </p:cNvPr>
@@ -4585,7 +4585,7 @@
           <p:cNvPr id="6" name="">
             <a:extLst xmlns:a="http://schemas.openxmlformats.org/drawingml/2006/main">
               <a:ext uri="{FF2B5EF4-FFF2-40B4-BE49-F238E27FC236}">
-                <a16:creationId xmlns:a16="http://schemas.microsoft.com/office/drawing/2014/main" id="{AE8EAA0C-C948-4FE9-A268-032614501C88}"/>
+                <a16:creationId xmlns:a16="http://schemas.microsoft.com/office/drawing/2014/main" id="{3726E969-95B1-4AFF-8C19-8B76AD7543F0}"/>
               </a:ext>
             </a:extLst>
           </p:cNvPr>
@@ -4642,7 +4642,7 @@
           <p:cNvPr id="7" name="">
             <a:extLst xmlns:a="http://schemas.openxmlformats.org/drawingml/2006/main">
               <a:ext uri="{FF2B5EF4-FFF2-40B4-BE49-F238E27FC236}">
-                <a16:creationId xmlns:a16="http://schemas.microsoft.com/office/drawing/2014/main" id="{6B58BEAF-75A9-48FE-99D8-67FA5FA03392}"/>
+                <a16:creationId xmlns:a16="http://schemas.microsoft.com/office/drawing/2014/main" id="{D28CF3C2-DB61-4B27-8567-B9BB86C7DC8D}"/>
               </a:ext>
             </a:extLst>
           </p:cNvPr>
@@ -4674,7 +4674,7 @@
           <p:cNvPr id="8" name="">
             <a:extLst xmlns:a="http://schemas.openxmlformats.org/drawingml/2006/main">
               <a:ext uri="{FF2B5EF4-FFF2-40B4-BE49-F238E27FC236}">
-                <a16:creationId xmlns:a16="http://schemas.microsoft.com/office/drawing/2014/main" id="{1A737481-EF71-4254-9F8B-AA492C79F323}"/>
+                <a16:creationId xmlns:a16="http://schemas.microsoft.com/office/drawing/2014/main" id="{F9388EB4-4FFB-4576-A246-9FC1DCB23EC7}"/>
               </a:ext>
             </a:extLst>
           </p:cNvPr>
@@ -4731,7 +4731,7 @@
           <p:cNvPr id="9" name="">
             <a:extLst xmlns:a="http://schemas.openxmlformats.org/drawingml/2006/main">
               <a:ext uri="{FF2B5EF4-FFF2-40B4-BE49-F238E27FC236}">
-                <a16:creationId xmlns:a16="http://schemas.microsoft.com/office/drawing/2014/main" id="{555A7252-419B-4037-B32E-6276362364E4}"/>
+                <a16:creationId xmlns:a16="http://schemas.microsoft.com/office/drawing/2014/main" id="{4EAA8D0D-0DC0-4E8E-9E1A-D41F56F725D4}"/>
               </a:ext>
             </a:extLst>
           </p:cNvPr>
@@ -4788,7 +4788,7 @@
           <p:cNvPr id="10" name="">
             <a:extLst xmlns:a="http://schemas.openxmlformats.org/drawingml/2006/main">
               <a:ext uri="{FF2B5EF4-FFF2-40B4-BE49-F238E27FC236}">
-                <a16:creationId xmlns:a16="http://schemas.microsoft.com/office/drawing/2014/main" id="{6E069455-5369-46DA-A058-1C505F4E0E5A}"/>
+                <a16:creationId xmlns:a16="http://schemas.microsoft.com/office/drawing/2014/main" id="{4EC1B827-BDBB-4A4F-83C4-08035CF8E73C}"/>
               </a:ext>
             </a:extLst>
           </p:cNvPr>
@@ -4822,7 +4822,7 @@
           <p:cNvPr id="11" name="">
             <a:extLst xmlns:a="http://schemas.openxmlformats.org/drawingml/2006/main">
               <a:ext uri="{FF2B5EF4-FFF2-40B4-BE49-F238E27FC236}">
-                <a16:creationId xmlns:a16="http://schemas.microsoft.com/office/drawing/2014/main" id="{5F66144C-4025-42FD-8699-BC2C55A96957}"/>
+                <a16:creationId xmlns:a16="http://schemas.microsoft.com/office/drawing/2014/main" id="{5B8A9654-AF6F-466E-A5ED-D6C3751B2458}"/>
               </a:ext>
             </a:extLst>
           </p:cNvPr>
@@ -4854,7 +4854,7 @@
           <p:cNvPr id="12" name="">
             <a:extLst xmlns:a="http://schemas.openxmlformats.org/drawingml/2006/main">
               <a:ext uri="{FF2B5EF4-FFF2-40B4-BE49-F238E27FC236}">
-                <a16:creationId xmlns:a16="http://schemas.microsoft.com/office/drawing/2014/main" id="{AF5D0FBE-ABE6-49ED-B6AD-24B64A55A77E}"/>
+                <a16:creationId xmlns:a16="http://schemas.microsoft.com/office/drawing/2014/main" id="{4F1D1E89-634B-43A7-9A63-4C3DDE43E95E}"/>
               </a:ext>
             </a:extLst>
           </p:cNvPr>
@@ -4911,7 +4911,7 @@
           <p:cNvPr id="13" name="">
             <a:extLst xmlns:a="http://schemas.openxmlformats.org/drawingml/2006/main">
               <a:ext uri="{FF2B5EF4-FFF2-40B4-BE49-F238E27FC236}">
-                <a16:creationId xmlns:a16="http://schemas.microsoft.com/office/drawing/2014/main" id="{4752C65A-ADB8-44E5-9BE5-5297E73B1170}"/>
+                <a16:creationId xmlns:a16="http://schemas.microsoft.com/office/drawing/2014/main" id="{BE002EF5-2A0C-4E63-9373-AD50363347CF}"/>
               </a:ext>
             </a:extLst>
           </p:cNvPr>
@@ -4968,7 +4968,7 @@
           <p:cNvPr id="14" name="">
             <a:extLst xmlns:a="http://schemas.openxmlformats.org/drawingml/2006/main">
               <a:ext uri="{FF2B5EF4-FFF2-40B4-BE49-F238E27FC236}">
-                <a16:creationId xmlns:a16="http://schemas.microsoft.com/office/drawing/2014/main" id="{C992F14D-66E7-4E02-9552-514F2C8845C4}"/>
+                <a16:creationId xmlns:a16="http://schemas.microsoft.com/office/drawing/2014/main" id="{C2506B45-F6E3-4F20-8C32-BB9C303E6FCC}"/>
               </a:ext>
             </a:extLst>
           </p:cNvPr>
@@ -5002,7 +5002,7 @@
           <p:cNvPr id="15" name="">
             <a:extLst xmlns:a="http://schemas.openxmlformats.org/drawingml/2006/main">
               <a:ext uri="{FF2B5EF4-FFF2-40B4-BE49-F238E27FC236}">
-                <a16:creationId xmlns:a16="http://schemas.microsoft.com/office/drawing/2014/main" id="{7AC7C61D-91FF-468A-A2BE-EA1BA0AA792E}"/>
+                <a16:creationId xmlns:a16="http://schemas.microsoft.com/office/drawing/2014/main" id="{574D6D3A-2794-424A-B761-3DF17848A03A}"/>
               </a:ext>
             </a:extLst>
           </p:cNvPr>
@@ -5034,7 +5034,7 @@
           <p:cNvPr id="16" name="">
             <a:extLst xmlns:a="http://schemas.openxmlformats.org/drawingml/2006/main">
               <a:ext uri="{FF2B5EF4-FFF2-40B4-BE49-F238E27FC236}">
-                <a16:creationId xmlns:a16="http://schemas.microsoft.com/office/drawing/2014/main" id="{F8E63FB0-2A5C-40FA-98AB-C99941403499}"/>
+                <a16:creationId xmlns:a16="http://schemas.microsoft.com/office/drawing/2014/main" id="{C32E1C3F-8829-4E26-B196-F7392E7D66E1}"/>
               </a:ext>
             </a:extLst>
           </p:cNvPr>
@@ -5091,7 +5091,7 @@
           <p:cNvPr id="17" name="">
             <a:extLst xmlns:a="http://schemas.openxmlformats.org/drawingml/2006/main">
               <a:ext uri="{FF2B5EF4-FFF2-40B4-BE49-F238E27FC236}">
-                <a16:creationId xmlns:a16="http://schemas.microsoft.com/office/drawing/2014/main" id="{5D34B8F5-0B70-4EAE-91D8-19B35C2BD14A}"/>
+                <a16:creationId xmlns:a16="http://schemas.microsoft.com/office/drawing/2014/main" id="{1BBA2E7D-1847-4701-B34D-B276C5F9D5CB}"/>
               </a:ext>
             </a:extLst>
           </p:cNvPr>
@@ -5148,7 +5148,7 @@
           <p:cNvPr id="18" name="">
             <a:extLst xmlns:a="http://schemas.openxmlformats.org/drawingml/2006/main">
               <a:ext uri="{FF2B5EF4-FFF2-40B4-BE49-F238E27FC236}">
-                <a16:creationId xmlns:a16="http://schemas.microsoft.com/office/drawing/2014/main" id="{059E0B12-7C74-4C6A-9D57-9D81A0761D81}"/>
+                <a16:creationId xmlns:a16="http://schemas.microsoft.com/office/drawing/2014/main" id="{86FB5CC3-4F0B-4334-B4EF-7A7DD7E82DC5}"/>
               </a:ext>
             </a:extLst>
           </p:cNvPr>
@@ -5182,7 +5182,7 @@
           <p:cNvPr id="19" name="">
             <a:extLst xmlns:a="http://schemas.openxmlformats.org/drawingml/2006/main">
               <a:ext uri="{FF2B5EF4-FFF2-40B4-BE49-F238E27FC236}">
-                <a16:creationId xmlns:a16="http://schemas.microsoft.com/office/drawing/2014/main" id="{CF0371B1-4370-4B8F-920B-8839078DB39C}"/>
+                <a16:creationId xmlns:a16="http://schemas.microsoft.com/office/drawing/2014/main" id="{E8345A6E-476A-4C1E-8A92-7AB37637C2FB}"/>
               </a:ext>
             </a:extLst>
           </p:cNvPr>
@@ -5214,7 +5214,7 @@
           <p:cNvPr id="20" name="">
             <a:extLst xmlns:a="http://schemas.openxmlformats.org/drawingml/2006/main">
               <a:ext uri="{FF2B5EF4-FFF2-40B4-BE49-F238E27FC236}">
-                <a16:creationId xmlns:a16="http://schemas.microsoft.com/office/drawing/2014/main" id="{A77FB75A-FB70-4DE2-BE76-D844781970F8}"/>
+                <a16:creationId xmlns:a16="http://schemas.microsoft.com/office/drawing/2014/main" id="{DF7F4B7E-ADAB-44B5-99A9-87926881B14E}"/>
               </a:ext>
             </a:extLst>
           </p:cNvPr>
@@ -5271,7 +5271,7 @@
           <p:cNvPr id="21" name="">
             <a:extLst xmlns:a="http://schemas.openxmlformats.org/drawingml/2006/main">
               <a:ext uri="{FF2B5EF4-FFF2-40B4-BE49-F238E27FC236}">
-                <a16:creationId xmlns:a16="http://schemas.microsoft.com/office/drawing/2014/main" id="{27D4B6B8-75A7-462A-9C13-BA1CD464F0DF}"/>
+                <a16:creationId xmlns:a16="http://schemas.microsoft.com/office/drawing/2014/main" id="{B01B52AD-78C1-48C5-BD73-A8F82BA5D624}"/>
               </a:ext>
             </a:extLst>
           </p:cNvPr>
@@ -5328,7 +5328,7 @@
           <p:cNvPr id="22" name="">
             <a:extLst xmlns:a="http://schemas.openxmlformats.org/drawingml/2006/main">
               <a:ext uri="{FF2B5EF4-FFF2-40B4-BE49-F238E27FC236}">
-                <a16:creationId xmlns:a16="http://schemas.microsoft.com/office/drawing/2014/main" id="{0895DEB6-1386-40A0-BBF9-B4058028054E}"/>
+                <a16:creationId xmlns:a16="http://schemas.microsoft.com/office/drawing/2014/main" id="{239B37E0-C0A5-4669-9343-116CF9379EC5}"/>
               </a:ext>
             </a:extLst>
           </p:cNvPr>
@@ -5383,7 +5383,7 @@
     </p:spTree>
     <p:extLst>
       <p:ext uri="{BB962C8B-B14F-4D97-AF65-F5344CB8AC3E}">
-        <p14:creationId xmlns:p14="http://schemas.microsoft.com/office/powerpoint/2010/main" val="736743378"/>
+        <p14:creationId xmlns:p14="http://schemas.microsoft.com/office/powerpoint/2010/main" val="1699757233"/>
       </p:ext>
     </p:extLst>
   </p:cSld>
@@ -5584,7 +5584,7 @@
           <p:cNvPr id="23" name="">
             <a:extLst xmlns:a="http://schemas.openxmlformats.org/drawingml/2006/main">
               <a:ext uri="{FF2B5EF4-FFF2-40B4-BE49-F238E27FC236}">
-                <a16:creationId xmlns:a16="http://schemas.microsoft.com/office/drawing/2014/main" id="{E0367794-BEDC-4268-B82D-B259021FD4E0}"/>
+                <a16:creationId xmlns:a16="http://schemas.microsoft.com/office/drawing/2014/main" id="{948F6A54-F0A3-42CC-ACCD-99E6F363123B}"/>
               </a:ext>
             </a:extLst>
           </p:cNvPr>
@@ -5616,7 +5616,7 @@
           <p:cNvPr id="2" name="">
             <a:extLst xmlns:a="http://schemas.openxmlformats.org/drawingml/2006/main">
               <a:ext uri="{FF2B5EF4-FFF2-40B4-BE49-F238E27FC236}">
-                <a16:creationId xmlns:a16="http://schemas.microsoft.com/office/drawing/2014/main" id="{0FE01170-D866-4A5A-B16C-5F549BCE3CFC}"/>
+                <a16:creationId xmlns:a16="http://schemas.microsoft.com/office/drawing/2014/main" id="{1E3FE0CC-19E8-422E-8A0D-5F35361AD6B8}"/>
               </a:ext>
             </a:extLst>
           </p:cNvPr>
@@ -5673,7 +5673,7 @@
           <p:cNvPr id="3" name="">
             <a:extLst xmlns:a="http://schemas.openxmlformats.org/drawingml/2006/main">
               <a:ext uri="{FF2B5EF4-FFF2-40B4-BE49-F238E27FC236}">
-                <a16:creationId xmlns:a16="http://schemas.microsoft.com/office/drawing/2014/main" id="{8EE4CD26-F90F-443E-881C-51796EDC2F42}"/>
+                <a16:creationId xmlns:a16="http://schemas.microsoft.com/office/drawing/2014/main" id="{88D16FE0-A094-4FEC-B75C-5C695A252254}"/>
               </a:ext>
             </a:extLst>
           </p:cNvPr>
@@ -5705,7 +5705,7 @@
           <p:cNvPr id="4" name="">
             <a:extLst xmlns:a="http://schemas.openxmlformats.org/drawingml/2006/main">
               <a:ext uri="{FF2B5EF4-FFF2-40B4-BE49-F238E27FC236}">
-                <a16:creationId xmlns:a16="http://schemas.microsoft.com/office/drawing/2014/main" id="{00821459-5464-4613-9FF9-BB5FD04B2F68}"/>
+                <a16:creationId xmlns:a16="http://schemas.microsoft.com/office/drawing/2014/main" id="{E9B8F246-7145-41E3-80A1-9B5F3F880F86}"/>
               </a:ext>
             </a:extLst>
           </p:cNvPr>
@@ -5762,7 +5762,7 @@
           <p:cNvPr id="5" name="">
             <a:extLst xmlns:a="http://schemas.openxmlformats.org/drawingml/2006/main">
               <a:ext uri="{FF2B5EF4-FFF2-40B4-BE49-F238E27FC236}">
-                <a16:creationId xmlns:a16="http://schemas.microsoft.com/office/drawing/2014/main" id="{B52A893A-35B0-4884-9DE8-39BE0DD12BF5}"/>
+                <a16:creationId xmlns:a16="http://schemas.microsoft.com/office/drawing/2014/main" id="{0EBED3EC-7B36-4C47-8494-3169E761640F}"/>
               </a:ext>
             </a:extLst>
           </p:cNvPr>
@@ -5819,7 +5819,7 @@
           <p:cNvPr id="6" name="">
             <a:extLst xmlns:a="http://schemas.openxmlformats.org/drawingml/2006/main">
               <a:ext uri="{FF2B5EF4-FFF2-40B4-BE49-F238E27FC236}">
-                <a16:creationId xmlns:a16="http://schemas.microsoft.com/office/drawing/2014/main" id="{DA272B7F-DA4B-4441-85A0-1B7F338B0D2D}"/>
+                <a16:creationId xmlns:a16="http://schemas.microsoft.com/office/drawing/2014/main" id="{6293EC30-4EAA-4458-89EB-EE0D63FC3AC7}"/>
               </a:ext>
             </a:extLst>
           </p:cNvPr>
@@ -5876,7 +5876,7 @@
           <p:cNvPr id="7" name="">
             <a:extLst xmlns:a="http://schemas.openxmlformats.org/drawingml/2006/main">
               <a:ext uri="{FF2B5EF4-FFF2-40B4-BE49-F238E27FC236}">
-                <a16:creationId xmlns:a16="http://schemas.microsoft.com/office/drawing/2014/main" id="{482D4683-C663-4489-BF0F-A43B89AEBC64}"/>
+                <a16:creationId xmlns:a16="http://schemas.microsoft.com/office/drawing/2014/main" id="{4024791B-BAD9-4CB2-9765-0A848F909EC8}"/>
               </a:ext>
             </a:extLst>
           </p:cNvPr>
@@ -5908,7 +5908,7 @@
           <p:cNvPr id="8" name="">
             <a:extLst xmlns:a="http://schemas.openxmlformats.org/drawingml/2006/main">
               <a:ext uri="{FF2B5EF4-FFF2-40B4-BE49-F238E27FC236}">
-                <a16:creationId xmlns:a16="http://schemas.microsoft.com/office/drawing/2014/main" id="{5704F271-837D-40D7-9743-E530D721F33C}"/>
+                <a16:creationId xmlns:a16="http://schemas.microsoft.com/office/drawing/2014/main" id="{0BB55756-B20D-457E-97F6-A5AF2B269E0E}"/>
               </a:ext>
             </a:extLst>
           </p:cNvPr>
@@ -5965,7 +5965,7 @@
           <p:cNvPr id="9" name="">
             <a:extLst xmlns:a="http://schemas.openxmlformats.org/drawingml/2006/main">
               <a:ext uri="{FF2B5EF4-FFF2-40B4-BE49-F238E27FC236}">
-                <a16:creationId xmlns:a16="http://schemas.microsoft.com/office/drawing/2014/main" id="{D19F8160-5E6A-4E48-A5FC-FC437F614F32}"/>
+                <a16:creationId xmlns:a16="http://schemas.microsoft.com/office/drawing/2014/main" id="{8BA89849-C751-4256-BD52-7E039A3B5E2F}"/>
               </a:ext>
             </a:extLst>
           </p:cNvPr>
@@ -6022,7 +6022,7 @@
           <p:cNvPr id="10" name="">
             <a:extLst xmlns:a="http://schemas.openxmlformats.org/drawingml/2006/main">
               <a:ext uri="{FF2B5EF4-FFF2-40B4-BE49-F238E27FC236}">
-                <a16:creationId xmlns:a16="http://schemas.microsoft.com/office/drawing/2014/main" id="{EBE5569E-1F28-460E-B965-90C8D941D5BC}"/>
+                <a16:creationId xmlns:a16="http://schemas.microsoft.com/office/drawing/2014/main" id="{A1C9FC49-F792-4555-B3D2-058C5EC2C6AD}"/>
               </a:ext>
             </a:extLst>
           </p:cNvPr>
@@ -6056,7 +6056,7 @@
           <p:cNvPr id="11" name="">
             <a:extLst xmlns:a="http://schemas.openxmlformats.org/drawingml/2006/main">
               <a:ext uri="{FF2B5EF4-FFF2-40B4-BE49-F238E27FC236}">
-                <a16:creationId xmlns:a16="http://schemas.microsoft.com/office/drawing/2014/main" id="{2F12B554-0C37-4266-8DC0-001DC63DF67B}"/>
+                <a16:creationId xmlns:a16="http://schemas.microsoft.com/office/drawing/2014/main" id="{82D8C605-8D3E-48E3-ABD4-D87CC4869F1B}"/>
               </a:ext>
             </a:extLst>
           </p:cNvPr>
@@ -6088,7 +6088,7 @@
           <p:cNvPr id="12" name="">
             <a:extLst xmlns:a="http://schemas.openxmlformats.org/drawingml/2006/main">
               <a:ext uri="{FF2B5EF4-FFF2-40B4-BE49-F238E27FC236}">
-                <a16:creationId xmlns:a16="http://schemas.microsoft.com/office/drawing/2014/main" id="{0B888AFD-6658-4806-A1F7-7171922E7778}"/>
+                <a16:creationId xmlns:a16="http://schemas.microsoft.com/office/drawing/2014/main" id="{607C7FC9-F687-43BB-8E80-F4BA84B493C2}"/>
               </a:ext>
             </a:extLst>
           </p:cNvPr>
@@ -6145,7 +6145,7 @@
           <p:cNvPr id="13" name="">
             <a:extLst xmlns:a="http://schemas.openxmlformats.org/drawingml/2006/main">
               <a:ext uri="{FF2B5EF4-FFF2-40B4-BE49-F238E27FC236}">
-                <a16:creationId xmlns:a16="http://schemas.microsoft.com/office/drawing/2014/main" id="{4C66C5A5-208B-4429-9446-40131010AA0B}"/>
+                <a16:creationId xmlns:a16="http://schemas.microsoft.com/office/drawing/2014/main" id="{32EF34B2-2DB2-4ADF-952F-8A6E5B876AE6}"/>
               </a:ext>
             </a:extLst>
           </p:cNvPr>
@@ -6202,7 +6202,7 @@
           <p:cNvPr id="14" name="">
             <a:extLst xmlns:a="http://schemas.openxmlformats.org/drawingml/2006/main">
               <a:ext uri="{FF2B5EF4-FFF2-40B4-BE49-F238E27FC236}">
-                <a16:creationId xmlns:a16="http://schemas.microsoft.com/office/drawing/2014/main" id="{B9BFC780-C9A1-4BD7-A36B-6BC4261C9BC4}"/>
+                <a16:creationId xmlns:a16="http://schemas.microsoft.com/office/drawing/2014/main" id="{BE1FDE75-A65D-49FF-80CD-E866100D6D2E}"/>
               </a:ext>
             </a:extLst>
           </p:cNvPr>
@@ -6236,7 +6236,7 @@
           <p:cNvPr id="15" name="">
             <a:extLst xmlns:a="http://schemas.openxmlformats.org/drawingml/2006/main">
               <a:ext uri="{FF2B5EF4-FFF2-40B4-BE49-F238E27FC236}">
-                <a16:creationId xmlns:a16="http://schemas.microsoft.com/office/drawing/2014/main" id="{2FD4AB05-6954-4A98-A145-04E398BF1E20}"/>
+                <a16:creationId xmlns:a16="http://schemas.microsoft.com/office/drawing/2014/main" id="{FB4B58FE-F118-45B2-A6CC-25DB093F1D8F}"/>
               </a:ext>
             </a:extLst>
           </p:cNvPr>
@@ -6268,7 +6268,7 @@
           <p:cNvPr id="16" name="">
             <a:extLst xmlns:a="http://schemas.openxmlformats.org/drawingml/2006/main">
               <a:ext uri="{FF2B5EF4-FFF2-40B4-BE49-F238E27FC236}">
-                <a16:creationId xmlns:a16="http://schemas.microsoft.com/office/drawing/2014/main" id="{C402D7DE-F3C4-41A3-A83F-FA5D23E60DA2}"/>
+                <a16:creationId xmlns:a16="http://schemas.microsoft.com/office/drawing/2014/main" id="{4C4EFEB1-60D2-40A0-89C5-616658E00A33}"/>
               </a:ext>
             </a:extLst>
           </p:cNvPr>
@@ -6325,7 +6325,7 @@
           <p:cNvPr id="17" name="">
             <a:extLst xmlns:a="http://schemas.openxmlformats.org/drawingml/2006/main">
               <a:ext uri="{FF2B5EF4-FFF2-40B4-BE49-F238E27FC236}">
-                <a16:creationId xmlns:a16="http://schemas.microsoft.com/office/drawing/2014/main" id="{B79CC192-079A-40B5-AA4B-C4A4589EF663}"/>
+                <a16:creationId xmlns:a16="http://schemas.microsoft.com/office/drawing/2014/main" id="{9A9FB81F-EE74-4C48-A694-7EB57BAEA8BF}"/>
               </a:ext>
             </a:extLst>
           </p:cNvPr>
@@ -6382,7 +6382,7 @@
           <p:cNvPr id="18" name="">
             <a:extLst xmlns:a="http://schemas.openxmlformats.org/drawingml/2006/main">
               <a:ext uri="{FF2B5EF4-FFF2-40B4-BE49-F238E27FC236}">
-                <a16:creationId xmlns:a16="http://schemas.microsoft.com/office/drawing/2014/main" id="{9EFA41AA-9688-4A1F-8F4E-F27D3F22026C}"/>
+                <a16:creationId xmlns:a16="http://schemas.microsoft.com/office/drawing/2014/main" id="{86B52E54-4589-4CFC-860A-F1F2FC5B1E2D}"/>
               </a:ext>
             </a:extLst>
           </p:cNvPr>
@@ -6416,7 +6416,7 @@
           <p:cNvPr id="19" name="">
             <a:extLst xmlns:a="http://schemas.openxmlformats.org/drawingml/2006/main">
               <a:ext uri="{FF2B5EF4-FFF2-40B4-BE49-F238E27FC236}">
-                <a16:creationId xmlns:a16="http://schemas.microsoft.com/office/drawing/2014/main" id="{161AD8C6-3CA9-4D37-9A3A-E5B90D7EE738}"/>
+                <a16:creationId xmlns:a16="http://schemas.microsoft.com/office/drawing/2014/main" id="{5AF34709-B957-43E3-8C3B-A9FE1F29ACA4}"/>
               </a:ext>
             </a:extLst>
           </p:cNvPr>
@@ -6448,7 +6448,7 @@
           <p:cNvPr id="20" name="">
             <a:extLst xmlns:a="http://schemas.openxmlformats.org/drawingml/2006/main">
               <a:ext uri="{FF2B5EF4-FFF2-40B4-BE49-F238E27FC236}">
-                <a16:creationId xmlns:a16="http://schemas.microsoft.com/office/drawing/2014/main" id="{E98E0BCD-0509-4CD1-B7ED-6A6DFF6EB948}"/>
+                <a16:creationId xmlns:a16="http://schemas.microsoft.com/office/drawing/2014/main" id="{FB7EF375-183C-47B1-BFFE-3EBA0CEE88BA}"/>
               </a:ext>
             </a:extLst>
           </p:cNvPr>
@@ -6505,7 +6505,7 @@
           <p:cNvPr id="21" name="">
             <a:extLst xmlns:a="http://schemas.openxmlformats.org/drawingml/2006/main">
               <a:ext uri="{FF2B5EF4-FFF2-40B4-BE49-F238E27FC236}">
-                <a16:creationId xmlns:a16="http://schemas.microsoft.com/office/drawing/2014/main" id="{741FEDFE-31F1-42FF-AA89-ADF2C613E808}"/>
+                <a16:creationId xmlns:a16="http://schemas.microsoft.com/office/drawing/2014/main" id="{0155EE5B-F8B8-4531-8804-2DB8D1D54A1C}"/>
               </a:ext>
             </a:extLst>
           </p:cNvPr>
@@ -6562,7 +6562,7 @@
           <p:cNvPr id="22" name="">
             <a:extLst xmlns:a="http://schemas.openxmlformats.org/drawingml/2006/main">
               <a:ext uri="{FF2B5EF4-FFF2-40B4-BE49-F238E27FC236}">
-                <a16:creationId xmlns:a16="http://schemas.microsoft.com/office/drawing/2014/main" id="{93CFA566-49FA-4FA8-AB52-8C34C7DEEB00}"/>
+                <a16:creationId xmlns:a16="http://schemas.microsoft.com/office/drawing/2014/main" id="{DFB942F1-42CC-417A-9476-2BEBB3BD6353}"/>
               </a:ext>
             </a:extLst>
           </p:cNvPr>
@@ -6617,7 +6617,7 @@
     </p:spTree>
     <p:extLst>
       <p:ext uri="{BB962C8B-B14F-4D97-AF65-F5344CB8AC3E}">
-        <p14:creationId xmlns:p14="http://schemas.microsoft.com/office/powerpoint/2010/main" val="945424555"/>
+        <p14:creationId xmlns:p14="http://schemas.microsoft.com/office/powerpoint/2010/main" val="589355821"/>
       </p:ext>
     </p:extLst>
   </p:cSld>
@@ -6818,7 +6818,7 @@
           <p:cNvPr id="16" name="">
             <a:extLst xmlns:a="http://schemas.openxmlformats.org/drawingml/2006/main">
               <a:ext uri="{FF2B5EF4-FFF2-40B4-BE49-F238E27FC236}">
-                <a16:creationId xmlns:a16="http://schemas.microsoft.com/office/drawing/2014/main" id="{F98FAE78-7C19-4CCD-8FA2-A4E741B550B5}"/>
+                <a16:creationId xmlns:a16="http://schemas.microsoft.com/office/drawing/2014/main" id="{CEA1A492-C1D3-4374-9270-F6A7344BCBBF}"/>
               </a:ext>
             </a:extLst>
           </p:cNvPr>
@@ -6850,7 +6850,7 @@
           <p:cNvPr id="2" name="">
             <a:extLst xmlns:a="http://schemas.openxmlformats.org/drawingml/2006/main">
               <a:ext uri="{FF2B5EF4-FFF2-40B4-BE49-F238E27FC236}">
-                <a16:creationId xmlns:a16="http://schemas.microsoft.com/office/drawing/2014/main" id="{D01AC88E-BC5F-4151-BD34-21DD3ED30468}"/>
+                <a16:creationId xmlns:a16="http://schemas.microsoft.com/office/drawing/2014/main" id="{25348A02-B028-46A5-BEF8-66CFEA9A44F6}"/>
               </a:ext>
             </a:extLst>
           </p:cNvPr>
@@ -6907,7 +6907,7 @@
           <p:cNvPr id="3" name="">
             <a:extLst xmlns:a="http://schemas.openxmlformats.org/drawingml/2006/main">
               <a:ext uri="{FF2B5EF4-FFF2-40B4-BE49-F238E27FC236}">
-                <a16:creationId xmlns:a16="http://schemas.microsoft.com/office/drawing/2014/main" id="{2987E8A1-07EC-4897-AC9E-25F8F91FB5A5}"/>
+                <a16:creationId xmlns:a16="http://schemas.microsoft.com/office/drawing/2014/main" id="{AC07759F-C961-4243-AB8D-C404573A22B9}"/>
               </a:ext>
             </a:extLst>
           </p:cNvPr>
@@ -6939,7 +6939,7 @@
           <p:cNvPr id="4" name="">
             <a:extLst xmlns:a="http://schemas.openxmlformats.org/drawingml/2006/main">
               <a:ext uri="{FF2B5EF4-FFF2-40B4-BE49-F238E27FC236}">
-                <a16:creationId xmlns:a16="http://schemas.microsoft.com/office/drawing/2014/main" id="{75A971D6-4A69-4FCC-B110-9E46D327B1B4}"/>
+                <a16:creationId xmlns:a16="http://schemas.microsoft.com/office/drawing/2014/main" id="{CD9EBD38-9F9A-4627-B90B-10EC0DEFFF9F}"/>
               </a:ext>
             </a:extLst>
           </p:cNvPr>
@@ -6996,7 +6996,7 @@
           <p:cNvPr id="5" name="">
             <a:extLst xmlns:a="http://schemas.openxmlformats.org/drawingml/2006/main">
               <a:ext uri="{FF2B5EF4-FFF2-40B4-BE49-F238E27FC236}">
-                <a16:creationId xmlns:a16="http://schemas.microsoft.com/office/drawing/2014/main" id="{13E1C6A1-5481-4E99-8314-55A9D740B29B}"/>
+                <a16:creationId xmlns:a16="http://schemas.microsoft.com/office/drawing/2014/main" id="{495C5102-3EAF-49AE-88F8-3B194976F5E1}"/>
               </a:ext>
             </a:extLst>
           </p:cNvPr>
@@ -7053,7 +7053,7 @@
           <p:cNvPr id="6" name="">
             <a:extLst xmlns:a="http://schemas.openxmlformats.org/drawingml/2006/main">
               <a:ext uri="{FF2B5EF4-FFF2-40B4-BE49-F238E27FC236}">
-                <a16:creationId xmlns:a16="http://schemas.microsoft.com/office/drawing/2014/main" id="{5E8312D9-1A49-4914-AE34-56220BC0B383}"/>
+                <a16:creationId xmlns:a16="http://schemas.microsoft.com/office/drawing/2014/main" id="{768D1683-5B6F-42E6-B700-D4579188C735}"/>
               </a:ext>
             </a:extLst>
           </p:cNvPr>
@@ -7110,7 +7110,7 @@
           <p:cNvPr id="7" name="">
             <a:extLst xmlns:a="http://schemas.openxmlformats.org/drawingml/2006/main">
               <a:ext uri="{FF2B5EF4-FFF2-40B4-BE49-F238E27FC236}">
-                <a16:creationId xmlns:a16="http://schemas.microsoft.com/office/drawing/2014/main" id="{6C3C771E-AADA-494C-9670-720725D123A3}"/>
+                <a16:creationId xmlns:a16="http://schemas.microsoft.com/office/drawing/2014/main" id="{51AC6D7C-CCD7-4A57-A95C-323EF490C07A}"/>
               </a:ext>
             </a:extLst>
           </p:cNvPr>
@@ -7142,7 +7142,7 @@
           <p:cNvPr id="8" name="">
             <a:extLst xmlns:a="http://schemas.openxmlformats.org/drawingml/2006/main">
               <a:ext uri="{FF2B5EF4-FFF2-40B4-BE49-F238E27FC236}">
-                <a16:creationId xmlns:a16="http://schemas.microsoft.com/office/drawing/2014/main" id="{9D4EE9D7-BE1A-4743-B367-A1E066662787}"/>
+                <a16:creationId xmlns:a16="http://schemas.microsoft.com/office/drawing/2014/main" id="{F510CB40-E5C6-407C-91C0-98EF9D6E51E0}"/>
               </a:ext>
             </a:extLst>
           </p:cNvPr>
@@ -7199,7 +7199,7 @@
           <p:cNvPr id="9" name="">
             <a:extLst xmlns:a="http://schemas.openxmlformats.org/drawingml/2006/main">
               <a:ext uri="{FF2B5EF4-FFF2-40B4-BE49-F238E27FC236}">
-                <a16:creationId xmlns:a16="http://schemas.microsoft.com/office/drawing/2014/main" id="{011B3DF8-3E2E-4B65-9ACC-45DBBD3389B3}"/>
+                <a16:creationId xmlns:a16="http://schemas.microsoft.com/office/drawing/2014/main" id="{8FA34A32-607E-4B59-9A14-DEE42B20DD83}"/>
               </a:ext>
             </a:extLst>
           </p:cNvPr>
@@ -7256,7 +7256,7 @@
           <p:cNvPr id="10" name="">
             <a:extLst xmlns:a="http://schemas.openxmlformats.org/drawingml/2006/main">
               <a:ext uri="{FF2B5EF4-FFF2-40B4-BE49-F238E27FC236}">
-                <a16:creationId xmlns:a16="http://schemas.microsoft.com/office/drawing/2014/main" id="{3A6868D8-F653-4489-AC0F-12D3589C2A44}"/>
+                <a16:creationId xmlns:a16="http://schemas.microsoft.com/office/drawing/2014/main" id="{0904923D-CFE3-4519-9D21-7B2450F7DC14}"/>
               </a:ext>
             </a:extLst>
           </p:cNvPr>
@@ -7313,7 +7313,7 @@
           <p:cNvPr id="11" name="">
             <a:extLst xmlns:a="http://schemas.openxmlformats.org/drawingml/2006/main">
               <a:ext uri="{FF2B5EF4-FFF2-40B4-BE49-F238E27FC236}">
-                <a16:creationId xmlns:a16="http://schemas.microsoft.com/office/drawing/2014/main" id="{D70FC66D-2E9D-4204-B947-AC98162F3387}"/>
+                <a16:creationId xmlns:a16="http://schemas.microsoft.com/office/drawing/2014/main" id="{FE973D39-5EE0-4862-ADED-0423EEF4D0AF}"/>
               </a:ext>
             </a:extLst>
           </p:cNvPr>
@@ -7345,7 +7345,7 @@
           <p:cNvPr id="12" name="">
             <a:extLst xmlns:a="http://schemas.openxmlformats.org/drawingml/2006/main">
               <a:ext uri="{FF2B5EF4-FFF2-40B4-BE49-F238E27FC236}">
-                <a16:creationId xmlns:a16="http://schemas.microsoft.com/office/drawing/2014/main" id="{8885D75B-5BF4-4FB9-930A-EA8A6DA8A5A1}"/>
+                <a16:creationId xmlns:a16="http://schemas.microsoft.com/office/drawing/2014/main" id="{97F966A6-F621-4FBD-ACC2-0CF291BF7FC1}"/>
               </a:ext>
             </a:extLst>
           </p:cNvPr>
@@ -7402,7 +7402,7 @@
           <p:cNvPr id="13" name="">
             <a:extLst xmlns:a="http://schemas.openxmlformats.org/drawingml/2006/main">
               <a:ext uri="{FF2B5EF4-FFF2-40B4-BE49-F238E27FC236}">
-                <a16:creationId xmlns:a16="http://schemas.microsoft.com/office/drawing/2014/main" id="{B0CF2E5C-2529-40BF-BA94-EA3D78C4A8F2}"/>
+                <a16:creationId xmlns:a16="http://schemas.microsoft.com/office/drawing/2014/main" id="{30FC3B61-2AD9-41E5-9D8C-93E3949005EC}"/>
               </a:ext>
             </a:extLst>
           </p:cNvPr>
@@ -7459,7 +7459,7 @@
           <p:cNvPr id="14" name="">
             <a:extLst xmlns:a="http://schemas.openxmlformats.org/drawingml/2006/main">
               <a:ext uri="{FF2B5EF4-FFF2-40B4-BE49-F238E27FC236}">
-                <a16:creationId xmlns:a16="http://schemas.microsoft.com/office/drawing/2014/main" id="{56888BB1-0621-4E56-A319-15C48E0C4A53}"/>
+                <a16:creationId xmlns:a16="http://schemas.microsoft.com/office/drawing/2014/main" id="{F05EED5C-3C1B-4875-8C31-2E928E2BF1E8}"/>
               </a:ext>
             </a:extLst>
           </p:cNvPr>
@@ -7516,7 +7516,7 @@
           <p:cNvPr id="15" name="">
             <a:extLst xmlns:a="http://schemas.openxmlformats.org/drawingml/2006/main">
               <a:ext uri="{FF2B5EF4-FFF2-40B4-BE49-F238E27FC236}">
-                <a16:creationId xmlns:a16="http://schemas.microsoft.com/office/drawing/2014/main" id="{5CF6976F-8C80-4020-8BCF-44F63AF722C2}"/>
+                <a16:creationId xmlns:a16="http://schemas.microsoft.com/office/drawing/2014/main" id="{EA052F42-9864-4BA3-9C8E-8DB610E495BD}"/>
               </a:ext>
             </a:extLst>
           </p:cNvPr>
@@ -7571,7 +7571,7 @@
     </p:spTree>
     <p:extLst>
       <p:ext uri="{BB962C8B-B14F-4D97-AF65-F5344CB8AC3E}">
-        <p14:creationId xmlns:p14="http://schemas.microsoft.com/office/powerpoint/2010/main" val="1809812978"/>
+        <p14:creationId xmlns:p14="http://schemas.microsoft.com/office/powerpoint/2010/main" val="79775164"/>
       </p:ext>
     </p:extLst>
   </p:cSld>
@@ -7772,7 +7772,7 @@
           <p:cNvPr id="23" name="">
             <a:extLst xmlns:a="http://schemas.openxmlformats.org/drawingml/2006/main">
               <a:ext uri="{FF2B5EF4-FFF2-40B4-BE49-F238E27FC236}">
-                <a16:creationId xmlns:a16="http://schemas.microsoft.com/office/drawing/2014/main" id="{2B5232D0-42D7-4556-B514-74EDEB3BCAD6}"/>
+                <a16:creationId xmlns:a16="http://schemas.microsoft.com/office/drawing/2014/main" id="{5BF97E97-48E9-4207-AA87-86BFAF4172D0}"/>
               </a:ext>
             </a:extLst>
           </p:cNvPr>
@@ -7804,7 +7804,7 @@
           <p:cNvPr id="2" name="">
             <a:extLst xmlns:a="http://schemas.openxmlformats.org/drawingml/2006/main">
               <a:ext uri="{FF2B5EF4-FFF2-40B4-BE49-F238E27FC236}">
-                <a16:creationId xmlns:a16="http://schemas.microsoft.com/office/drawing/2014/main" id="{C503BE23-5AF0-4EB7-A129-685E4B972F80}"/>
+                <a16:creationId xmlns:a16="http://schemas.microsoft.com/office/drawing/2014/main" id="{78CA189B-AD5B-479B-986C-AAD306946458}"/>
               </a:ext>
             </a:extLst>
           </p:cNvPr>
@@ -7861,7 +7861,7 @@
           <p:cNvPr id="3" name="">
             <a:extLst xmlns:a="http://schemas.openxmlformats.org/drawingml/2006/main">
               <a:ext uri="{FF2B5EF4-FFF2-40B4-BE49-F238E27FC236}">
-                <a16:creationId xmlns:a16="http://schemas.microsoft.com/office/drawing/2014/main" id="{3356073C-9A27-4F25-A38E-38A5ADB942F0}"/>
+                <a16:creationId xmlns:a16="http://schemas.microsoft.com/office/drawing/2014/main" id="{15851E5F-C2A6-4881-9E4A-F71C9E5871DA}"/>
               </a:ext>
             </a:extLst>
           </p:cNvPr>
@@ -7893,7 +7893,7 @@
           <p:cNvPr id="4" name="">
             <a:extLst xmlns:a="http://schemas.openxmlformats.org/drawingml/2006/main">
               <a:ext uri="{FF2B5EF4-FFF2-40B4-BE49-F238E27FC236}">
-                <a16:creationId xmlns:a16="http://schemas.microsoft.com/office/drawing/2014/main" id="{70D192FE-4BC9-4199-9003-2FF3FF73D4E3}"/>
+                <a16:creationId xmlns:a16="http://schemas.microsoft.com/office/drawing/2014/main" id="{05970CE2-31D3-4D3E-9144-56292C7C422E}"/>
               </a:ext>
             </a:extLst>
           </p:cNvPr>
@@ -7950,7 +7950,7 @@
           <p:cNvPr id="5" name="">
             <a:extLst xmlns:a="http://schemas.openxmlformats.org/drawingml/2006/main">
               <a:ext uri="{FF2B5EF4-FFF2-40B4-BE49-F238E27FC236}">
-                <a16:creationId xmlns:a16="http://schemas.microsoft.com/office/drawing/2014/main" id="{34BEA2A0-76DB-4D1F-9906-93018BF3D359}"/>
+                <a16:creationId xmlns:a16="http://schemas.microsoft.com/office/drawing/2014/main" id="{BF8DB41E-F7DD-4654-B3B9-889C744345F7}"/>
               </a:ext>
             </a:extLst>
           </p:cNvPr>
@@ -8007,7 +8007,7 @@
           <p:cNvPr id="6" name="">
             <a:extLst xmlns:a="http://schemas.openxmlformats.org/drawingml/2006/main">
               <a:ext uri="{FF2B5EF4-FFF2-40B4-BE49-F238E27FC236}">
-                <a16:creationId xmlns:a16="http://schemas.microsoft.com/office/drawing/2014/main" id="{5E3BE0CA-807B-49E9-A888-D3A3328F37CC}"/>
+                <a16:creationId xmlns:a16="http://schemas.microsoft.com/office/drawing/2014/main" id="{9EFFE809-6829-4262-A6AC-D96CEFA7D370}"/>
               </a:ext>
             </a:extLst>
           </p:cNvPr>
@@ -8064,7 +8064,7 @@
           <p:cNvPr id="7" name="">
             <a:extLst xmlns:a="http://schemas.openxmlformats.org/drawingml/2006/main">
               <a:ext uri="{FF2B5EF4-FFF2-40B4-BE49-F238E27FC236}">
-                <a16:creationId xmlns:a16="http://schemas.microsoft.com/office/drawing/2014/main" id="{A3275B2C-1942-4B9F-B324-CE2025CD9D79}"/>
+                <a16:creationId xmlns:a16="http://schemas.microsoft.com/office/drawing/2014/main" id="{485F7ED1-A21C-4E0D-BD52-BDB746977296}"/>
               </a:ext>
             </a:extLst>
           </p:cNvPr>
@@ -8096,7 +8096,7 @@
           <p:cNvPr id="8" name="">
             <a:extLst xmlns:a="http://schemas.openxmlformats.org/drawingml/2006/main">
               <a:ext uri="{FF2B5EF4-FFF2-40B4-BE49-F238E27FC236}">
-                <a16:creationId xmlns:a16="http://schemas.microsoft.com/office/drawing/2014/main" id="{E5BF9510-58C3-4419-85ED-D3396C6E764F}"/>
+                <a16:creationId xmlns:a16="http://schemas.microsoft.com/office/drawing/2014/main" id="{79B00087-012E-4EB0-A2C8-E32545FF5FCA}"/>
               </a:ext>
             </a:extLst>
           </p:cNvPr>
@@ -8153,7 +8153,7 @@
           <p:cNvPr id="9" name="">
             <a:extLst xmlns:a="http://schemas.openxmlformats.org/drawingml/2006/main">
               <a:ext uri="{FF2B5EF4-FFF2-40B4-BE49-F238E27FC236}">
-                <a16:creationId xmlns:a16="http://schemas.microsoft.com/office/drawing/2014/main" id="{5470887B-CC57-4B7A-A13F-C67CBBE29136}"/>
+                <a16:creationId xmlns:a16="http://schemas.microsoft.com/office/drawing/2014/main" id="{2CF1D86B-EF62-4391-BA22-2223936E9381}"/>
               </a:ext>
             </a:extLst>
           </p:cNvPr>
@@ -8210,19 +8210,19 @@
           <p:cNvPr id="10" name="">
             <a:extLst xmlns:a="http://schemas.openxmlformats.org/drawingml/2006/main">
               <a:ext uri="{FF2B5EF4-FFF2-40B4-BE49-F238E27FC236}">
-                <a16:creationId xmlns:a16="http://schemas.microsoft.com/office/drawing/2014/main" id="{62190467-4F54-4180-93B5-4C66CBBA172D}"/>
-              </a:ext>
-            </a:extLst>
-          </p:cNvPr>
-          <p:cNvSpPr>
-            <a:spLocks xmlns:a="http://schemas.openxmlformats.org/drawingml/2006/main" noGrp="1"/>
-          </p:cNvSpPr>
-          <p:nvPr/>
-        </p:nvSpPr>
-        <p:spPr>
-          <a:xfrm xmlns:a="http://schemas.openxmlformats.org/drawingml/2006/main">
-            <a:off x="914400" y="1257300"/>
-            <a:ext cx="10363200" cy="781050"/>
+                <a16:creationId xmlns:a16="http://schemas.microsoft.com/office/drawing/2014/main" id="{7CA9108A-16D3-4F46-8868-A9870C45DDC1}"/>
+              </a:ext>
+            </a:extLst>
+          </p:cNvPr>
+          <p:cNvSpPr>
+            <a:spLocks xmlns:a="http://schemas.openxmlformats.org/drawingml/2006/main" noGrp="1"/>
+          </p:cNvSpPr>
+          <p:nvPr/>
+        </p:nvSpPr>
+        <p:spPr>
+          <a:xfrm xmlns:a="http://schemas.openxmlformats.org/drawingml/2006/main">
+            <a:off x="857250" y="1219200"/>
+            <a:ext cx="10477500" cy="742950"/>
           </a:xfrm>
           <a:prstGeom xmlns:a="http://schemas.openxmlformats.org/drawingml/2006/main" prst="rect">
             <a:avLst/>
@@ -8239,7 +8239,7 @@
           <a:lstStyle xmlns:a="http://schemas.openxmlformats.org/drawingml/2006/main"/>
           <a:p xmlns:a="http://schemas.openxmlformats.org/drawingml/2006/main">
             <a:pPr algn="ctr">
-              <a:defRPr sz="2175" b="1">
+              <a:defRPr sz="2100" b="1">
                 <a:solidFill>
                   <a:srgbClr val="17253A"/>
                 </a:solidFill>
@@ -8249,7 +8249,7 @@
               </a:defRPr>
             </a:pPr>
             <a:r>
-              <a:rPr sz="2175" b="1">
+              <a:rPr sz="2100" b="1">
                 <a:solidFill>
                   <a:srgbClr val="17253A"/>
                 </a:solidFill>
@@ -8267,28 +8267,30 @@
           <p:cNvPr id="11" name="">
             <a:extLst xmlns:a="http://schemas.openxmlformats.org/drawingml/2006/main">
               <a:ext uri="{FF2B5EF4-FFF2-40B4-BE49-F238E27FC236}">
-                <a16:creationId xmlns:a16="http://schemas.microsoft.com/office/drawing/2014/main" id="{D7746310-1824-48D1-8F8D-66D0BB8CE51F}"/>
-              </a:ext>
-            </a:extLst>
-          </p:cNvPr>
-          <p:cNvSpPr>
-            <a:spLocks xmlns:a="http://schemas.openxmlformats.org/drawingml/2006/main" noGrp="1"/>
-          </p:cNvSpPr>
-          <p:nvPr/>
-        </p:nvSpPr>
-        <p:spPr>
-          <a:xfrm xmlns:a="http://schemas.openxmlformats.org/drawingml/2006/main">
-            <a:off x="1000125" y="2247900"/>
-            <a:ext cx="476250" cy="476250"/>
-          </a:xfrm>
-          <a:prstGeom xmlns:a="http://schemas.openxmlformats.org/drawingml/2006/main" prst="ellipse">
+                <a16:creationId xmlns:a16="http://schemas.microsoft.com/office/drawing/2014/main" id="{D504D003-FA47-4600-8D92-44209F6640B6}"/>
+              </a:ext>
+            </a:extLst>
+          </p:cNvPr>
+          <p:cNvSpPr>
+            <a:spLocks xmlns:a="http://schemas.openxmlformats.org/drawingml/2006/main" noGrp="1"/>
+          </p:cNvSpPr>
+          <p:nvPr/>
+        </p:nvSpPr>
+        <p:spPr>
+          <a:xfrm xmlns:a="http://schemas.openxmlformats.org/drawingml/2006/main">
+            <a:off x="971550" y="2124075"/>
+            <a:ext cx="38100" cy="3524250"/>
+          </a:xfrm>
+          <a:prstGeom xmlns:a="http://schemas.openxmlformats.org/drawingml/2006/main" prst="rect">
             <a:avLst/>
           </a:prstGeom>
           <a:solidFill xmlns:a="http://schemas.openxmlformats.org/drawingml/2006/main">
-            <a:srgbClr val="18324A"/>
+            <a:srgbClr val="2C6E73"/>
           </a:solidFill>
           <a:ln xmlns:a="http://schemas.openxmlformats.org/drawingml/2006/main" w="0">
-            <a:noFill/>
+            <a:solidFill>
+              <a:srgbClr val="2C6E73"/>
+            </a:solidFill>
           </a:ln>
         </p:spPr>
       </p:sp>
@@ -8297,19 +8299,19 @@
           <p:cNvPr id="12" name="">
             <a:extLst xmlns:a="http://schemas.openxmlformats.org/drawingml/2006/main">
               <a:ext uri="{FF2B5EF4-FFF2-40B4-BE49-F238E27FC236}">
-                <a16:creationId xmlns:a16="http://schemas.microsoft.com/office/drawing/2014/main" id="{50E76816-3793-477D-8037-A4429A8C6301}"/>
-              </a:ext>
-            </a:extLst>
-          </p:cNvPr>
-          <p:cNvSpPr>
-            <a:spLocks xmlns:a="http://schemas.openxmlformats.org/drawingml/2006/main" noGrp="1"/>
-          </p:cNvSpPr>
-          <p:nvPr/>
-        </p:nvSpPr>
-        <p:spPr>
-          <a:xfrm xmlns:a="http://schemas.openxmlformats.org/drawingml/2006/main">
-            <a:off x="1000125" y="2276475"/>
-            <a:ext cx="476250" cy="419100"/>
+                <a16:creationId xmlns:a16="http://schemas.microsoft.com/office/drawing/2014/main" id="{0E5A7206-D026-4EC4-B22E-96164DF1EE05}"/>
+              </a:ext>
+            </a:extLst>
+          </p:cNvPr>
+          <p:cNvSpPr>
+            <a:spLocks xmlns:a="http://schemas.openxmlformats.org/drawingml/2006/main" noGrp="1"/>
+          </p:cNvSpPr>
+          <p:nvPr/>
+        </p:nvSpPr>
+        <p:spPr>
+          <a:xfrm xmlns:a="http://schemas.openxmlformats.org/drawingml/2006/main">
+            <a:off x="1162050" y="2200275"/>
+            <a:ext cx="400050" cy="400050"/>
           </a:xfrm>
           <a:prstGeom xmlns:a="http://schemas.openxmlformats.org/drawingml/2006/main" prst="rect">
             <a:avLst/>
@@ -8326,9 +8328,9 @@
           <a:lstStyle xmlns:a="http://schemas.openxmlformats.org/drawingml/2006/main"/>
           <a:p xmlns:a="http://schemas.openxmlformats.org/drawingml/2006/main">
             <a:pPr algn="ctr">
-              <a:defRPr sz="1350" b="1">
-                <a:solidFill>
-                  <a:srgbClr val="FFFFFF"/>
+              <a:defRPr sz="1125" b="1">
+                <a:solidFill>
+                  <a:srgbClr val="2C6E73"/>
                 </a:solidFill>
                 <a:latin typeface="Arial"/>
                 <a:ea typeface="Arial"/>
@@ -8336,9 +8338,9 @@
               </a:defRPr>
             </a:pPr>
             <a:r>
-              <a:rPr sz="1350" b="1">
-                <a:solidFill>
-                  <a:srgbClr val="FFFFFF"/>
+              <a:rPr sz="1125" b="1">
+                <a:solidFill>
+                  <a:srgbClr val="2C6E73"/>
                 </a:solidFill>
                 <a:latin typeface="Arial"/>
                 <a:ea typeface="Arial"/>
@@ -8354,19 +8356,19 @@
           <p:cNvPr id="13" name="">
             <a:extLst xmlns:a="http://schemas.openxmlformats.org/drawingml/2006/main">
               <a:ext uri="{FF2B5EF4-FFF2-40B4-BE49-F238E27FC236}">
-                <a16:creationId xmlns:a16="http://schemas.microsoft.com/office/drawing/2014/main" id="{27DE66E7-9D6E-44C0-A84D-32C72CDEA9EB}"/>
-              </a:ext>
-            </a:extLst>
-          </p:cNvPr>
-          <p:cNvSpPr>
-            <a:spLocks xmlns:a="http://schemas.openxmlformats.org/drawingml/2006/main" noGrp="1"/>
-          </p:cNvSpPr>
-          <p:nvPr/>
-        </p:nvSpPr>
-        <p:spPr>
-          <a:xfrm xmlns:a="http://schemas.openxmlformats.org/drawingml/2006/main">
-            <a:off x="1714500" y="2181225"/>
-            <a:ext cx="9429750" cy="609600"/>
+                <a16:creationId xmlns:a16="http://schemas.microsoft.com/office/drawing/2014/main" id="{D8A9181E-7678-410F-9B97-6E71110BD531}"/>
+              </a:ext>
+            </a:extLst>
+          </p:cNvPr>
+          <p:cNvSpPr>
+            <a:spLocks xmlns:a="http://schemas.openxmlformats.org/drawingml/2006/main" noGrp="1"/>
+          </p:cNvSpPr>
+          <p:nvPr/>
+        </p:nvSpPr>
+        <p:spPr>
+          <a:xfrm xmlns:a="http://schemas.openxmlformats.org/drawingml/2006/main">
+            <a:off x="1714500" y="2114550"/>
+            <a:ext cx="9525000" cy="809625"/>
           </a:xfrm>
           <a:prstGeom xmlns:a="http://schemas.openxmlformats.org/drawingml/2006/main" prst="rect">
             <a:avLst/>
@@ -8383,7 +8385,7 @@
           <a:lstStyle xmlns:a="http://schemas.openxmlformats.org/drawingml/2006/main"/>
           <a:p xmlns:a="http://schemas.openxmlformats.org/drawingml/2006/main">
             <a:pPr algn="l">
-              <a:defRPr sz="1500" b="0">
+              <a:defRPr sz="1725" b="0">
                 <a:solidFill>
                   <a:srgbClr val="17253A"/>
                 </a:solidFill>
@@ -8393,7 +8395,7 @@
               </a:defRPr>
             </a:pPr>
             <a:r>
-              <a:rPr sz="1500" b="0">
+              <a:rPr sz="1725" b="0">
                 <a:solidFill>
                   <a:srgbClr val="17253A"/>
                 </a:solidFill>
@@ -8401,7 +8403,7 @@
                 <a:ea typeface="Arial"/>
                 <a:cs typeface="Arial"/>
               </a:rPr>
-              <a:t>Identify the structure: Identify the multiplicative scale or total number of ratio parts.</a:t>
+              <a:t>1 cm represents 8 km</a:t>
             </a:r>
           </a:p>
         </p:txBody>
@@ -8411,28 +8413,30 @@
           <p:cNvPr id="14" name="">
             <a:extLst xmlns:a="http://schemas.openxmlformats.org/drawingml/2006/main">
               <a:ext uri="{FF2B5EF4-FFF2-40B4-BE49-F238E27FC236}">
-                <a16:creationId xmlns:a16="http://schemas.microsoft.com/office/drawing/2014/main" id="{37EEDD23-D49C-436A-ACAD-6B5A930FF4C0}"/>
-              </a:ext>
-            </a:extLst>
-          </p:cNvPr>
-          <p:cNvSpPr>
-            <a:spLocks xmlns:a="http://schemas.openxmlformats.org/drawingml/2006/main" noGrp="1"/>
-          </p:cNvSpPr>
-          <p:nvPr/>
-        </p:nvSpPr>
-        <p:spPr>
-          <a:xfrm xmlns:a="http://schemas.openxmlformats.org/drawingml/2006/main">
-            <a:off x="1000125" y="2990850"/>
-            <a:ext cx="476250" cy="476250"/>
-          </a:xfrm>
-          <a:prstGeom xmlns:a="http://schemas.openxmlformats.org/drawingml/2006/main" prst="ellipse">
+                <a16:creationId xmlns:a16="http://schemas.microsoft.com/office/drawing/2014/main" id="{0C53878C-8C54-4372-9E10-1363DA0AD030}"/>
+              </a:ext>
+            </a:extLst>
+          </p:cNvPr>
+          <p:cNvSpPr>
+            <a:spLocks xmlns:a="http://schemas.openxmlformats.org/drawingml/2006/main" noGrp="1"/>
+          </p:cNvSpPr>
+          <p:nvPr/>
+        </p:nvSpPr>
+        <p:spPr>
+          <a:xfrm xmlns:a="http://schemas.openxmlformats.org/drawingml/2006/main">
+            <a:off x="1714500" y="2943225"/>
+            <a:ext cx="9334500" cy="9525"/>
+          </a:xfrm>
+          <a:prstGeom xmlns:a="http://schemas.openxmlformats.org/drawingml/2006/main" prst="rect">
             <a:avLst/>
           </a:prstGeom>
           <a:solidFill xmlns:a="http://schemas.openxmlformats.org/drawingml/2006/main">
-            <a:srgbClr val="2C6E73"/>
+            <a:srgbClr val="D9E0E6"/>
           </a:solidFill>
           <a:ln xmlns:a="http://schemas.openxmlformats.org/drawingml/2006/main" w="0">
-            <a:noFill/>
+            <a:solidFill>
+              <a:srgbClr val="D9E0E6"/>
+            </a:solidFill>
           </a:ln>
         </p:spPr>
       </p:sp>
@@ -8441,19 +8445,19 @@
           <p:cNvPr id="15" name="">
             <a:extLst xmlns:a="http://schemas.openxmlformats.org/drawingml/2006/main">
               <a:ext uri="{FF2B5EF4-FFF2-40B4-BE49-F238E27FC236}">
-                <a16:creationId xmlns:a16="http://schemas.microsoft.com/office/drawing/2014/main" id="{25A2E391-9A6B-4BFD-AEC2-7D3DE53CA512}"/>
-              </a:ext>
-            </a:extLst>
-          </p:cNvPr>
-          <p:cNvSpPr>
-            <a:spLocks xmlns:a="http://schemas.openxmlformats.org/drawingml/2006/main" noGrp="1"/>
-          </p:cNvSpPr>
-          <p:nvPr/>
-        </p:nvSpPr>
-        <p:spPr>
-          <a:xfrm xmlns:a="http://schemas.openxmlformats.org/drawingml/2006/main">
-            <a:off x="1000125" y="3019425"/>
-            <a:ext cx="476250" cy="419100"/>
+                <a16:creationId xmlns:a16="http://schemas.microsoft.com/office/drawing/2014/main" id="{09EDB805-C955-415D-B6B6-89A865A5A1E3}"/>
+              </a:ext>
+            </a:extLst>
+          </p:cNvPr>
+          <p:cNvSpPr>
+            <a:spLocks xmlns:a="http://schemas.openxmlformats.org/drawingml/2006/main" noGrp="1"/>
+          </p:cNvSpPr>
+          <p:nvPr/>
+        </p:nvSpPr>
+        <p:spPr>
+          <a:xfrm xmlns:a="http://schemas.openxmlformats.org/drawingml/2006/main">
+            <a:off x="1162050" y="3076575"/>
+            <a:ext cx="400050" cy="400050"/>
           </a:xfrm>
           <a:prstGeom xmlns:a="http://schemas.openxmlformats.org/drawingml/2006/main" prst="rect">
             <a:avLst/>
@@ -8470,9 +8474,9 @@
           <a:lstStyle xmlns:a="http://schemas.openxmlformats.org/drawingml/2006/main"/>
           <a:p xmlns:a="http://schemas.openxmlformats.org/drawingml/2006/main">
             <a:pPr algn="ctr">
-              <a:defRPr sz="1350" b="1">
-                <a:solidFill>
-                  <a:srgbClr val="FFFFFF"/>
+              <a:defRPr sz="1125" b="1">
+                <a:solidFill>
+                  <a:srgbClr val="2C6E73"/>
                 </a:solidFill>
                 <a:latin typeface="Arial"/>
                 <a:ea typeface="Arial"/>
@@ -8480,9 +8484,9 @@
               </a:defRPr>
             </a:pPr>
             <a:r>
-              <a:rPr sz="1350" b="1">
-                <a:solidFill>
-                  <a:srgbClr val="FFFFFF"/>
+              <a:rPr sz="1125" b="1">
+                <a:solidFill>
+                  <a:srgbClr val="2C6E73"/>
                 </a:solidFill>
                 <a:latin typeface="Arial"/>
                 <a:ea typeface="Arial"/>
@@ -8498,19 +8502,19 @@
           <p:cNvPr id="16" name="">
             <a:extLst xmlns:a="http://schemas.openxmlformats.org/drawingml/2006/main">
               <a:ext uri="{FF2B5EF4-FFF2-40B4-BE49-F238E27FC236}">
-                <a16:creationId xmlns:a16="http://schemas.microsoft.com/office/drawing/2014/main" id="{CF292529-6C98-4D95-9213-866FE6B1BA78}"/>
-              </a:ext>
-            </a:extLst>
-          </p:cNvPr>
-          <p:cNvSpPr>
-            <a:spLocks xmlns:a="http://schemas.openxmlformats.org/drawingml/2006/main" noGrp="1"/>
-          </p:cNvSpPr>
-          <p:nvPr/>
-        </p:nvSpPr>
-        <p:spPr>
-          <a:xfrm xmlns:a="http://schemas.openxmlformats.org/drawingml/2006/main">
-            <a:off x="1714500" y="2924175"/>
-            <a:ext cx="9429750" cy="609600"/>
+                <a16:creationId xmlns:a16="http://schemas.microsoft.com/office/drawing/2014/main" id="{F6A2A71D-2069-49AD-8B7A-C3A025E1A647}"/>
+              </a:ext>
+            </a:extLst>
+          </p:cNvPr>
+          <p:cNvSpPr>
+            <a:spLocks xmlns:a="http://schemas.openxmlformats.org/drawingml/2006/main" noGrp="1"/>
+          </p:cNvSpPr>
+          <p:nvPr/>
+        </p:nvSpPr>
+        <p:spPr>
+          <a:xfrm xmlns:a="http://schemas.openxmlformats.org/drawingml/2006/main">
+            <a:off x="1714500" y="2990850"/>
+            <a:ext cx="9525000" cy="809625"/>
           </a:xfrm>
           <a:prstGeom xmlns:a="http://schemas.openxmlformats.org/drawingml/2006/main" prst="rect">
             <a:avLst/>
@@ -8527,7 +8531,7 @@
           <a:lstStyle xmlns:a="http://schemas.openxmlformats.org/drawingml/2006/main"/>
           <a:p xmlns:a="http://schemas.openxmlformats.org/drawingml/2006/main">
             <a:pPr algn="l">
-              <a:defRPr sz="1500" b="0">
+              <a:defRPr sz="1725" b="0">
                 <a:solidFill>
                   <a:srgbClr val="17253A"/>
                 </a:solidFill>
@@ -8537,7 +8541,7 @@
               </a:defRPr>
             </a:pPr>
             <a:r>
-              <a:rPr sz="1500" b="0">
+              <a:rPr sz="1725" b="0">
                 <a:solidFill>
                   <a:srgbClr val="17253A"/>
                 </a:solidFill>
@@ -8545,7 +8549,7 @@
                 <a:ea typeface="Arial"/>
                 <a:cs typeface="Arial"/>
               </a:rPr>
-              <a:t>Set up the method: Apply the factor consistently or find the value of one part.</a:t>
+              <a:t>6.5 cm represents 6.5 × 8 km</a:t>
             </a:r>
           </a:p>
         </p:txBody>
@@ -8555,28 +8559,30 @@
           <p:cNvPr id="17" name="">
             <a:extLst xmlns:a="http://schemas.openxmlformats.org/drawingml/2006/main">
               <a:ext uri="{FF2B5EF4-FFF2-40B4-BE49-F238E27FC236}">
-                <a16:creationId xmlns:a16="http://schemas.microsoft.com/office/drawing/2014/main" id="{48F0FA27-1BFB-4C3F-ACC1-F6BAC372D766}"/>
-              </a:ext>
-            </a:extLst>
-          </p:cNvPr>
-          <p:cNvSpPr>
-            <a:spLocks xmlns:a="http://schemas.openxmlformats.org/drawingml/2006/main" noGrp="1"/>
-          </p:cNvSpPr>
-          <p:nvPr/>
-        </p:nvSpPr>
-        <p:spPr>
-          <a:xfrm xmlns:a="http://schemas.openxmlformats.org/drawingml/2006/main">
-            <a:off x="1000125" y="3733800"/>
-            <a:ext cx="476250" cy="476250"/>
-          </a:xfrm>
-          <a:prstGeom xmlns:a="http://schemas.openxmlformats.org/drawingml/2006/main" prst="ellipse">
+                <a16:creationId xmlns:a16="http://schemas.microsoft.com/office/drawing/2014/main" id="{02304DF5-8594-4878-AF7A-31392D9C338D}"/>
+              </a:ext>
+            </a:extLst>
+          </p:cNvPr>
+          <p:cNvSpPr>
+            <a:spLocks xmlns:a="http://schemas.openxmlformats.org/drawingml/2006/main" noGrp="1"/>
+          </p:cNvSpPr>
+          <p:nvPr/>
+        </p:nvSpPr>
+        <p:spPr>
+          <a:xfrm xmlns:a="http://schemas.openxmlformats.org/drawingml/2006/main">
+            <a:off x="1714500" y="3819525"/>
+            <a:ext cx="9334500" cy="9525"/>
+          </a:xfrm>
+          <a:prstGeom xmlns:a="http://schemas.openxmlformats.org/drawingml/2006/main" prst="rect">
             <a:avLst/>
           </a:prstGeom>
           <a:solidFill xmlns:a="http://schemas.openxmlformats.org/drawingml/2006/main">
-            <a:srgbClr val="2C6E73"/>
+            <a:srgbClr val="D9E0E6"/>
           </a:solidFill>
           <a:ln xmlns:a="http://schemas.openxmlformats.org/drawingml/2006/main" w="0">
-            <a:noFill/>
+            <a:solidFill>
+              <a:srgbClr val="D9E0E6"/>
+            </a:solidFill>
           </a:ln>
         </p:spPr>
       </p:sp>
@@ -8585,19 +8591,19 @@
           <p:cNvPr id="18" name="">
             <a:extLst xmlns:a="http://schemas.openxmlformats.org/drawingml/2006/main">
               <a:ext uri="{FF2B5EF4-FFF2-40B4-BE49-F238E27FC236}">
-                <a16:creationId xmlns:a16="http://schemas.microsoft.com/office/drawing/2014/main" id="{F26BE672-9374-4E70-980B-135B2DDCB982}"/>
-              </a:ext>
-            </a:extLst>
-          </p:cNvPr>
-          <p:cNvSpPr>
-            <a:spLocks xmlns:a="http://schemas.openxmlformats.org/drawingml/2006/main" noGrp="1"/>
-          </p:cNvSpPr>
-          <p:nvPr/>
-        </p:nvSpPr>
-        <p:spPr>
-          <a:xfrm xmlns:a="http://schemas.openxmlformats.org/drawingml/2006/main">
-            <a:off x="1000125" y="3762375"/>
-            <a:ext cx="476250" cy="419100"/>
+                <a16:creationId xmlns:a16="http://schemas.microsoft.com/office/drawing/2014/main" id="{565E4741-AFD3-4508-B3B3-D4870A83B24A}"/>
+              </a:ext>
+            </a:extLst>
+          </p:cNvPr>
+          <p:cNvSpPr>
+            <a:spLocks xmlns:a="http://schemas.openxmlformats.org/drawingml/2006/main" noGrp="1"/>
+          </p:cNvSpPr>
+          <p:nvPr/>
+        </p:nvSpPr>
+        <p:spPr>
+          <a:xfrm xmlns:a="http://schemas.openxmlformats.org/drawingml/2006/main">
+            <a:off x="1162050" y="3952875"/>
+            <a:ext cx="400050" cy="400050"/>
           </a:xfrm>
           <a:prstGeom xmlns:a="http://schemas.openxmlformats.org/drawingml/2006/main" prst="rect">
             <a:avLst/>
@@ -8614,9 +8620,9 @@
           <a:lstStyle xmlns:a="http://schemas.openxmlformats.org/drawingml/2006/main"/>
           <a:p xmlns:a="http://schemas.openxmlformats.org/drawingml/2006/main">
             <a:pPr algn="ctr">
-              <a:defRPr sz="1350" b="1">
-                <a:solidFill>
-                  <a:srgbClr val="FFFFFF"/>
+              <a:defRPr sz="1125" b="1">
+                <a:solidFill>
+                  <a:srgbClr val="2C6E73"/>
                 </a:solidFill>
                 <a:latin typeface="Arial"/>
                 <a:ea typeface="Arial"/>
@@ -8624,9 +8630,9 @@
               </a:defRPr>
             </a:pPr>
             <a:r>
-              <a:rPr sz="1350" b="1">
-                <a:solidFill>
-                  <a:srgbClr val="FFFFFF"/>
+              <a:rPr sz="1125" b="1">
+                <a:solidFill>
+                  <a:srgbClr val="2C6E73"/>
                 </a:solidFill>
                 <a:latin typeface="Arial"/>
                 <a:ea typeface="Arial"/>
@@ -8642,19 +8648,19 @@
           <p:cNvPr id="19" name="">
             <a:extLst xmlns:a="http://schemas.openxmlformats.org/drawingml/2006/main">
               <a:ext uri="{FF2B5EF4-FFF2-40B4-BE49-F238E27FC236}">
-                <a16:creationId xmlns:a16="http://schemas.microsoft.com/office/drawing/2014/main" id="{4CDDF075-BC22-446A-B48F-274281D1CB6C}"/>
-              </a:ext>
-            </a:extLst>
-          </p:cNvPr>
-          <p:cNvSpPr>
-            <a:spLocks xmlns:a="http://schemas.openxmlformats.org/drawingml/2006/main" noGrp="1"/>
-          </p:cNvSpPr>
-          <p:nvPr/>
-        </p:nvSpPr>
-        <p:spPr>
-          <a:xfrm xmlns:a="http://schemas.openxmlformats.org/drawingml/2006/main">
-            <a:off x="1714500" y="3667125"/>
-            <a:ext cx="9429750" cy="609600"/>
+                <a16:creationId xmlns:a16="http://schemas.microsoft.com/office/drawing/2014/main" id="{BA3DA1FE-8E1C-4FD3-A78A-967B4846DC1B}"/>
+              </a:ext>
+            </a:extLst>
+          </p:cNvPr>
+          <p:cNvSpPr>
+            <a:spLocks xmlns:a="http://schemas.openxmlformats.org/drawingml/2006/main" noGrp="1"/>
+          </p:cNvSpPr>
+          <p:nvPr/>
+        </p:nvSpPr>
+        <p:spPr>
+          <a:xfrm xmlns:a="http://schemas.openxmlformats.org/drawingml/2006/main">
+            <a:off x="1714500" y="3867150"/>
+            <a:ext cx="9525000" cy="809625"/>
           </a:xfrm>
           <a:prstGeom xmlns:a="http://schemas.openxmlformats.org/drawingml/2006/main" prst="rect">
             <a:avLst/>
@@ -8671,7 +8677,7 @@
           <a:lstStyle xmlns:a="http://schemas.openxmlformats.org/drawingml/2006/main"/>
           <a:p xmlns:a="http://schemas.openxmlformats.org/drawingml/2006/main">
             <a:pPr algn="l">
-              <a:defRPr sz="1500" b="0">
+              <a:defRPr sz="1725" b="0">
                 <a:solidFill>
                   <a:srgbClr val="17253A"/>
                 </a:solidFill>
@@ -8681,7 +8687,7 @@
               </a:defRPr>
             </a:pPr>
             <a:r>
-              <a:rPr sz="1500" b="0">
+              <a:rPr sz="1725" b="0">
                 <a:solidFill>
                   <a:srgbClr val="17253A"/>
                 </a:solidFill>
@@ -8689,7 +8695,7 @@
                 <a:ea typeface="Arial"/>
                 <a:cs typeface="Arial"/>
               </a:rPr>
-              <a:t>Complete the calculation: 52 km.</a:t>
+              <a:t>6 × 8 = 48     0.5 × 8 = 4</a:t>
             </a:r>
           </a:p>
         </p:txBody>
@@ -8699,28 +8705,30 @@
           <p:cNvPr id="20" name="">
             <a:extLst xmlns:a="http://schemas.openxmlformats.org/drawingml/2006/main">
               <a:ext uri="{FF2B5EF4-FFF2-40B4-BE49-F238E27FC236}">
-                <a16:creationId xmlns:a16="http://schemas.microsoft.com/office/drawing/2014/main" id="{62DCDB75-2007-4668-BB33-0CD192171149}"/>
-              </a:ext>
-            </a:extLst>
-          </p:cNvPr>
-          <p:cNvSpPr>
-            <a:spLocks xmlns:a="http://schemas.openxmlformats.org/drawingml/2006/main" noGrp="1"/>
-          </p:cNvSpPr>
-          <p:nvPr/>
-        </p:nvSpPr>
-        <p:spPr>
-          <a:xfrm xmlns:a="http://schemas.openxmlformats.org/drawingml/2006/main">
-            <a:off x="1000125" y="4476750"/>
-            <a:ext cx="476250" cy="476250"/>
-          </a:xfrm>
-          <a:prstGeom xmlns:a="http://schemas.openxmlformats.org/drawingml/2006/main" prst="ellipse">
+                <a16:creationId xmlns:a16="http://schemas.microsoft.com/office/drawing/2014/main" id="{AA09F2BB-ED36-4CBC-B6E4-3EC7FB87D67D}"/>
+              </a:ext>
+            </a:extLst>
+          </p:cNvPr>
+          <p:cNvSpPr>
+            <a:spLocks xmlns:a="http://schemas.openxmlformats.org/drawingml/2006/main" noGrp="1"/>
+          </p:cNvSpPr>
+          <p:nvPr/>
+        </p:nvSpPr>
+        <p:spPr>
+          <a:xfrm xmlns:a="http://schemas.openxmlformats.org/drawingml/2006/main">
+            <a:off x="1714500" y="4695825"/>
+            <a:ext cx="9334500" cy="9525"/>
+          </a:xfrm>
+          <a:prstGeom xmlns:a="http://schemas.openxmlformats.org/drawingml/2006/main" prst="rect">
             <a:avLst/>
           </a:prstGeom>
           <a:solidFill xmlns:a="http://schemas.openxmlformats.org/drawingml/2006/main">
-            <a:srgbClr val="2C6E73"/>
+            <a:srgbClr val="D9E0E6"/>
           </a:solidFill>
           <a:ln xmlns:a="http://schemas.openxmlformats.org/drawingml/2006/main" w="0">
-            <a:noFill/>
+            <a:solidFill>
+              <a:srgbClr val="D9E0E6"/>
+            </a:solidFill>
           </a:ln>
         </p:spPr>
       </p:sp>
@@ -8729,19 +8737,19 @@
           <p:cNvPr id="21" name="">
             <a:extLst xmlns:a="http://schemas.openxmlformats.org/drawingml/2006/main">
               <a:ext uri="{FF2B5EF4-FFF2-40B4-BE49-F238E27FC236}">
-                <a16:creationId xmlns:a16="http://schemas.microsoft.com/office/drawing/2014/main" id="{2BDBAAC2-4A6A-4713-9D37-47EB29B3811A}"/>
-              </a:ext>
-            </a:extLst>
-          </p:cNvPr>
-          <p:cNvSpPr>
-            <a:spLocks xmlns:a="http://schemas.openxmlformats.org/drawingml/2006/main" noGrp="1"/>
-          </p:cNvSpPr>
-          <p:nvPr/>
-        </p:nvSpPr>
-        <p:spPr>
-          <a:xfrm xmlns:a="http://schemas.openxmlformats.org/drawingml/2006/main">
-            <a:off x="1000125" y="4505325"/>
-            <a:ext cx="476250" cy="419100"/>
+                <a16:creationId xmlns:a16="http://schemas.microsoft.com/office/drawing/2014/main" id="{88363E5F-FAAE-47B6-96CE-3972CC428B69}"/>
+              </a:ext>
+            </a:extLst>
+          </p:cNvPr>
+          <p:cNvSpPr>
+            <a:spLocks xmlns:a="http://schemas.openxmlformats.org/drawingml/2006/main" noGrp="1"/>
+          </p:cNvSpPr>
+          <p:nvPr/>
+        </p:nvSpPr>
+        <p:spPr>
+          <a:xfrm xmlns:a="http://schemas.openxmlformats.org/drawingml/2006/main">
+            <a:off x="1162050" y="4829175"/>
+            <a:ext cx="400050" cy="400050"/>
           </a:xfrm>
           <a:prstGeom xmlns:a="http://schemas.openxmlformats.org/drawingml/2006/main" prst="rect">
             <a:avLst/>
@@ -8758,9 +8766,9 @@
           <a:lstStyle xmlns:a="http://schemas.openxmlformats.org/drawingml/2006/main"/>
           <a:p xmlns:a="http://schemas.openxmlformats.org/drawingml/2006/main">
             <a:pPr algn="ctr">
-              <a:defRPr sz="1350" b="1">
-                <a:solidFill>
-                  <a:srgbClr val="FFFFFF"/>
+              <a:defRPr sz="1125" b="1">
+                <a:solidFill>
+                  <a:srgbClr val="2F785D"/>
                 </a:solidFill>
                 <a:latin typeface="Arial"/>
                 <a:ea typeface="Arial"/>
@@ -8768,9 +8776,9 @@
               </a:defRPr>
             </a:pPr>
             <a:r>
-              <a:rPr sz="1350" b="1">
-                <a:solidFill>
-                  <a:srgbClr val="FFFFFF"/>
+              <a:rPr sz="1125" b="1">
+                <a:solidFill>
+                  <a:srgbClr val="2F785D"/>
                 </a:solidFill>
                 <a:latin typeface="Arial"/>
                 <a:ea typeface="Arial"/>
@@ -8786,19 +8794,19 @@
           <p:cNvPr id="22" name="">
             <a:extLst xmlns:a="http://schemas.openxmlformats.org/drawingml/2006/main">
               <a:ext uri="{FF2B5EF4-FFF2-40B4-BE49-F238E27FC236}">
-                <a16:creationId xmlns:a16="http://schemas.microsoft.com/office/drawing/2014/main" id="{03580860-157A-4825-83B8-6204451340CF}"/>
-              </a:ext>
-            </a:extLst>
-          </p:cNvPr>
-          <p:cNvSpPr>
-            <a:spLocks xmlns:a="http://schemas.openxmlformats.org/drawingml/2006/main" noGrp="1"/>
-          </p:cNvSpPr>
-          <p:nvPr/>
-        </p:nvSpPr>
-        <p:spPr>
-          <a:xfrm xmlns:a="http://schemas.openxmlformats.org/drawingml/2006/main">
-            <a:off x="1714500" y="4410075"/>
-            <a:ext cx="9429750" cy="609600"/>
+                <a16:creationId xmlns:a16="http://schemas.microsoft.com/office/drawing/2014/main" id="{D4DEA829-1F2E-4DA8-96AB-1A5956D36507}"/>
+              </a:ext>
+            </a:extLst>
+          </p:cNvPr>
+          <p:cNvSpPr>
+            <a:spLocks xmlns:a="http://schemas.openxmlformats.org/drawingml/2006/main" noGrp="1"/>
+          </p:cNvSpPr>
+          <p:nvPr/>
+        </p:nvSpPr>
+        <p:spPr>
+          <a:xfrm xmlns:a="http://schemas.openxmlformats.org/drawingml/2006/main">
+            <a:off x="1714500" y="4743450"/>
+            <a:ext cx="9525000" cy="809625"/>
           </a:xfrm>
           <a:prstGeom xmlns:a="http://schemas.openxmlformats.org/drawingml/2006/main" prst="rect">
             <a:avLst/>
@@ -8815,7 +8823,7 @@
           <a:lstStyle xmlns:a="http://schemas.openxmlformats.org/drawingml/2006/main"/>
           <a:p xmlns:a="http://schemas.openxmlformats.org/drawingml/2006/main">
             <a:pPr algn="l">
-              <a:defRPr sz="1500" b="1">
+              <a:defRPr sz="1725" b="1">
                 <a:solidFill>
                   <a:srgbClr val="2F785D"/>
                 </a:solidFill>
@@ -8825,7 +8833,7 @@
               </a:defRPr>
             </a:pPr>
             <a:r>
-              <a:rPr sz="1500" b="1">
+              <a:rPr sz="1725" b="1">
                 <a:solidFill>
                   <a:srgbClr val="2F785D"/>
                 </a:solidFill>
@@ -8833,7 +8841,7 @@
                 <a:ea typeface="Arial"/>
                 <a:cs typeface="Arial"/>
               </a:rPr>
-              <a:t>Check the result: Recombine and check the total or corresponding measure.</a:t>
+              <a:t>48 + 4 = 52 km</a:t>
             </a:r>
           </a:p>
         </p:txBody>
@@ -8841,7 +8849,7 @@
     </p:spTree>
     <p:extLst>
       <p:ext uri="{BB962C8B-B14F-4D97-AF65-F5344CB8AC3E}">
-        <p14:creationId xmlns:p14="http://schemas.microsoft.com/office/powerpoint/2010/main" val="320468609"/>
+        <p14:creationId xmlns:p14="http://schemas.microsoft.com/office/powerpoint/2010/main" val="2103641268"/>
       </p:ext>
     </p:extLst>
   </p:cSld>
@@ -9134,7 +9142,7 @@
           <p:cNvPr id="15" name="">
             <a:extLst xmlns:a="http://schemas.openxmlformats.org/drawingml/2006/main">
               <a:ext uri="{FF2B5EF4-FFF2-40B4-BE49-F238E27FC236}">
-                <a16:creationId xmlns:a16="http://schemas.microsoft.com/office/drawing/2014/main" id="{FBC8BCA4-923F-4BFE-B8DC-80C9BB8A5C47}"/>
+                <a16:creationId xmlns:a16="http://schemas.microsoft.com/office/drawing/2014/main" id="{EC157056-4184-46E7-8392-8B0A3FF22C05}"/>
               </a:ext>
             </a:extLst>
           </p:cNvPr>
@@ -9166,7 +9174,7 @@
           <p:cNvPr id="2" name="">
             <a:extLst xmlns:a="http://schemas.openxmlformats.org/drawingml/2006/main">
               <a:ext uri="{FF2B5EF4-FFF2-40B4-BE49-F238E27FC236}">
-                <a16:creationId xmlns:a16="http://schemas.microsoft.com/office/drawing/2014/main" id="{61A29BA6-1263-4669-9245-0239E1CF9F74}"/>
+                <a16:creationId xmlns:a16="http://schemas.microsoft.com/office/drawing/2014/main" id="{B168A3DD-E67B-4F6A-B830-5C01365D88F8}"/>
               </a:ext>
             </a:extLst>
           </p:cNvPr>
@@ -9223,7 +9231,7 @@
           <p:cNvPr id="3" name="">
             <a:extLst xmlns:a="http://schemas.openxmlformats.org/drawingml/2006/main">
               <a:ext uri="{FF2B5EF4-FFF2-40B4-BE49-F238E27FC236}">
-                <a16:creationId xmlns:a16="http://schemas.microsoft.com/office/drawing/2014/main" id="{4F2C23A2-5EE5-497E-B3A2-A18E78EF753C}"/>
+                <a16:creationId xmlns:a16="http://schemas.microsoft.com/office/drawing/2014/main" id="{38B3F5DC-44EA-4D90-A5BE-312152E05568}"/>
               </a:ext>
             </a:extLst>
           </p:cNvPr>
@@ -9255,7 +9263,7 @@
           <p:cNvPr id="4" name="">
             <a:extLst xmlns:a="http://schemas.openxmlformats.org/drawingml/2006/main">
               <a:ext uri="{FF2B5EF4-FFF2-40B4-BE49-F238E27FC236}">
-                <a16:creationId xmlns:a16="http://schemas.microsoft.com/office/drawing/2014/main" id="{5A6BE614-8D2E-4938-8541-2A23C3A894C1}"/>
+                <a16:creationId xmlns:a16="http://schemas.microsoft.com/office/drawing/2014/main" id="{99AEB8EB-97D6-4327-B191-DA651102C347}"/>
               </a:ext>
             </a:extLst>
           </p:cNvPr>
@@ -9312,7 +9320,7 @@
           <p:cNvPr id="5" name="">
             <a:extLst xmlns:a="http://schemas.openxmlformats.org/drawingml/2006/main">
               <a:ext uri="{FF2B5EF4-FFF2-40B4-BE49-F238E27FC236}">
-                <a16:creationId xmlns:a16="http://schemas.microsoft.com/office/drawing/2014/main" id="{A039230D-C580-4C3F-96E4-96435F65B9BA}"/>
+                <a16:creationId xmlns:a16="http://schemas.microsoft.com/office/drawing/2014/main" id="{B704FE84-3CB8-48AC-B0C8-F95CFC9E87B9}"/>
               </a:ext>
             </a:extLst>
           </p:cNvPr>
@@ -9369,7 +9377,7 @@
           <p:cNvPr id="6" name="">
             <a:extLst xmlns:a="http://schemas.openxmlformats.org/drawingml/2006/main">
               <a:ext uri="{FF2B5EF4-FFF2-40B4-BE49-F238E27FC236}">
-                <a16:creationId xmlns:a16="http://schemas.microsoft.com/office/drawing/2014/main" id="{6A0F6A64-A5F5-4A9E-B234-DD48125AEB50}"/>
+                <a16:creationId xmlns:a16="http://schemas.microsoft.com/office/drawing/2014/main" id="{CACED623-F8F4-483C-8408-FE750BD6990D}"/>
               </a:ext>
             </a:extLst>
           </p:cNvPr>
@@ -9426,7 +9434,7 @@
           <p:cNvPr id="7" name="">
             <a:extLst xmlns:a="http://schemas.openxmlformats.org/drawingml/2006/main">
               <a:ext uri="{FF2B5EF4-FFF2-40B4-BE49-F238E27FC236}">
-                <a16:creationId xmlns:a16="http://schemas.microsoft.com/office/drawing/2014/main" id="{9C14DECF-BA45-4986-A297-BEE8589EA5C3}"/>
+                <a16:creationId xmlns:a16="http://schemas.microsoft.com/office/drawing/2014/main" id="{CE2557D9-53D2-42B2-BEB9-32A2C7E8C7BD}"/>
               </a:ext>
             </a:extLst>
           </p:cNvPr>
@@ -9458,7 +9466,7 @@
           <p:cNvPr id="8" name="">
             <a:extLst xmlns:a="http://schemas.openxmlformats.org/drawingml/2006/main">
               <a:ext uri="{FF2B5EF4-FFF2-40B4-BE49-F238E27FC236}">
-                <a16:creationId xmlns:a16="http://schemas.microsoft.com/office/drawing/2014/main" id="{83C80555-581D-499F-B47D-7B5C43896C7E}"/>
+                <a16:creationId xmlns:a16="http://schemas.microsoft.com/office/drawing/2014/main" id="{CE295C85-BF50-45A4-9A8A-58E582486223}"/>
               </a:ext>
             </a:extLst>
           </p:cNvPr>
@@ -9515,7 +9523,7 @@
           <p:cNvPr id="9" name="">
             <a:extLst xmlns:a="http://schemas.openxmlformats.org/drawingml/2006/main">
               <a:ext uri="{FF2B5EF4-FFF2-40B4-BE49-F238E27FC236}">
-                <a16:creationId xmlns:a16="http://schemas.microsoft.com/office/drawing/2014/main" id="{61F83676-D3B5-4619-8586-D6C924F12022}"/>
+                <a16:creationId xmlns:a16="http://schemas.microsoft.com/office/drawing/2014/main" id="{DE47169B-B9D6-45F8-AAFF-D984683F4C0A}"/>
               </a:ext>
             </a:extLst>
           </p:cNvPr>
@@ -9572,7 +9580,7 @@
           <p:cNvPr id="10" name="">
             <a:extLst xmlns:a="http://schemas.openxmlformats.org/drawingml/2006/main">
               <a:ext uri="{FF2B5EF4-FFF2-40B4-BE49-F238E27FC236}">
-                <a16:creationId xmlns:a16="http://schemas.microsoft.com/office/drawing/2014/main" id="{63E8026E-BB2A-4AD2-9426-476ADE034EDF}"/>
+                <a16:creationId xmlns:a16="http://schemas.microsoft.com/office/drawing/2014/main" id="{B4ADF6D7-9DA1-44D8-BCD2-6027A27961B8}"/>
               </a:ext>
             </a:extLst>
           </p:cNvPr>
@@ -9629,7 +9637,7 @@
           <p:cNvPr id="11" name="">
             <a:extLst xmlns:a="http://schemas.openxmlformats.org/drawingml/2006/main">
               <a:ext uri="{FF2B5EF4-FFF2-40B4-BE49-F238E27FC236}">
-                <a16:creationId xmlns:a16="http://schemas.microsoft.com/office/drawing/2014/main" id="{3CF769E3-992F-40BD-BE68-82F32237981A}"/>
+                <a16:creationId xmlns:a16="http://schemas.microsoft.com/office/drawing/2014/main" id="{53387C0F-1D9C-40DE-B9E7-B3EE45D86A9F}"/>
               </a:ext>
             </a:extLst>
           </p:cNvPr>
@@ -9686,7 +9694,7 @@
           <p:cNvPr id="12" name="">
             <a:extLst xmlns:a="http://schemas.openxmlformats.org/drawingml/2006/main">
               <a:ext uri="{FF2B5EF4-FFF2-40B4-BE49-F238E27FC236}">
-                <a16:creationId xmlns:a16="http://schemas.microsoft.com/office/drawing/2014/main" id="{8E6248B2-0C2E-4E07-A945-CB33B64C4476}"/>
+                <a16:creationId xmlns:a16="http://schemas.microsoft.com/office/drawing/2014/main" id="{A8FDF16A-4F14-4F5E-A398-5BE5C4E045DD}"/>
               </a:ext>
             </a:extLst>
           </p:cNvPr>
@@ -9718,7 +9726,7 @@
           <p:cNvPr id="13" name="">
             <a:extLst xmlns:a="http://schemas.openxmlformats.org/drawingml/2006/main">
               <a:ext uri="{FF2B5EF4-FFF2-40B4-BE49-F238E27FC236}">
-                <a16:creationId xmlns:a16="http://schemas.microsoft.com/office/drawing/2014/main" id="{4C35B338-92F2-4361-B95F-AD398CFC9960}"/>
+                <a16:creationId xmlns:a16="http://schemas.microsoft.com/office/drawing/2014/main" id="{08B606DD-B80A-4F7D-9CA4-BDF53859A506}"/>
               </a:ext>
             </a:extLst>
           </p:cNvPr>
@@ -9775,7 +9783,7 @@
           <p:cNvPr id="14" name="">
             <a:extLst xmlns:a="http://schemas.openxmlformats.org/drawingml/2006/main">
               <a:ext uri="{FF2B5EF4-FFF2-40B4-BE49-F238E27FC236}">
-                <a16:creationId xmlns:a16="http://schemas.microsoft.com/office/drawing/2014/main" id="{EBE9F3AB-5620-4144-94B1-89EB77733395}"/>
+                <a16:creationId xmlns:a16="http://schemas.microsoft.com/office/drawing/2014/main" id="{78433949-B3F1-476A-B07F-6D95EDD45239}"/>
               </a:ext>
             </a:extLst>
           </p:cNvPr>
@@ -9830,7 +9838,7 @@
     </p:spTree>
     <p:extLst>
       <p:ext uri="{BB962C8B-B14F-4D97-AF65-F5344CB8AC3E}">
-        <p14:creationId xmlns:p14="http://schemas.microsoft.com/office/powerpoint/2010/main" val="454593735"/>
+        <p14:creationId xmlns:p14="http://schemas.microsoft.com/office/powerpoint/2010/main" val="87310329"/>
       </p:ext>
     </p:extLst>
   </p:cSld>
@@ -10031,7 +10039,7 @@
           <p:cNvPr id="16" name="">
             <a:extLst xmlns:a="http://schemas.openxmlformats.org/drawingml/2006/main">
               <a:ext uri="{FF2B5EF4-FFF2-40B4-BE49-F238E27FC236}">
-                <a16:creationId xmlns:a16="http://schemas.microsoft.com/office/drawing/2014/main" id="{27CA4FAC-1AB9-4CE5-872B-DE3364FC68C4}"/>
+                <a16:creationId xmlns:a16="http://schemas.microsoft.com/office/drawing/2014/main" id="{FF81367F-C8FE-4E84-B1F5-26A0D4191258}"/>
               </a:ext>
             </a:extLst>
           </p:cNvPr>
@@ -10063,7 +10071,7 @@
           <p:cNvPr id="2" name="">
             <a:extLst xmlns:a="http://schemas.openxmlformats.org/drawingml/2006/main">
               <a:ext uri="{FF2B5EF4-FFF2-40B4-BE49-F238E27FC236}">
-                <a16:creationId xmlns:a16="http://schemas.microsoft.com/office/drawing/2014/main" id="{9BC4E7A6-79B8-486D-80E3-47894C7BD99A}"/>
+                <a16:creationId xmlns:a16="http://schemas.microsoft.com/office/drawing/2014/main" id="{B740E5A1-F306-46EB-B984-3EC7A551374A}"/>
               </a:ext>
             </a:extLst>
           </p:cNvPr>
@@ -10120,7 +10128,7 @@
           <p:cNvPr id="3" name="">
             <a:extLst xmlns:a="http://schemas.openxmlformats.org/drawingml/2006/main">
               <a:ext uri="{FF2B5EF4-FFF2-40B4-BE49-F238E27FC236}">
-                <a16:creationId xmlns:a16="http://schemas.microsoft.com/office/drawing/2014/main" id="{3F125E87-3444-49A8-BA24-816A82A07994}"/>
+                <a16:creationId xmlns:a16="http://schemas.microsoft.com/office/drawing/2014/main" id="{9A2A6367-6B4A-487A-9B52-533D08BC599F}"/>
               </a:ext>
             </a:extLst>
           </p:cNvPr>
@@ -10152,7 +10160,7 @@
           <p:cNvPr id="4" name="">
             <a:extLst xmlns:a="http://schemas.openxmlformats.org/drawingml/2006/main">
               <a:ext uri="{FF2B5EF4-FFF2-40B4-BE49-F238E27FC236}">
-                <a16:creationId xmlns:a16="http://schemas.microsoft.com/office/drawing/2014/main" id="{F45D377C-DB8A-40F4-9F24-20B71C564542}"/>
+                <a16:creationId xmlns:a16="http://schemas.microsoft.com/office/drawing/2014/main" id="{8E154501-5093-448F-BE84-362A78873E8F}"/>
               </a:ext>
             </a:extLst>
           </p:cNvPr>
@@ -10209,7 +10217,7 @@
           <p:cNvPr id="5" name="">
             <a:extLst xmlns:a="http://schemas.openxmlformats.org/drawingml/2006/main">
               <a:ext uri="{FF2B5EF4-FFF2-40B4-BE49-F238E27FC236}">
-                <a16:creationId xmlns:a16="http://schemas.microsoft.com/office/drawing/2014/main" id="{7B2E1C4A-79FD-4D3B-B536-F900BBF04759}"/>
+                <a16:creationId xmlns:a16="http://schemas.microsoft.com/office/drawing/2014/main" id="{968B3580-C897-4FB7-BD5A-7FDF90F0E72B}"/>
               </a:ext>
             </a:extLst>
           </p:cNvPr>
@@ -10266,7 +10274,7 @@
           <p:cNvPr id="6" name="">
             <a:extLst xmlns:a="http://schemas.openxmlformats.org/drawingml/2006/main">
               <a:ext uri="{FF2B5EF4-FFF2-40B4-BE49-F238E27FC236}">
-                <a16:creationId xmlns:a16="http://schemas.microsoft.com/office/drawing/2014/main" id="{9E1B764D-6331-426A-84D1-9E56DBA90714}"/>
+                <a16:creationId xmlns:a16="http://schemas.microsoft.com/office/drawing/2014/main" id="{EF80830D-539D-467E-9D9B-C43D6ACA02BA}"/>
               </a:ext>
             </a:extLst>
           </p:cNvPr>
@@ -10323,7 +10331,7 @@
           <p:cNvPr id="7" name="">
             <a:extLst xmlns:a="http://schemas.openxmlformats.org/drawingml/2006/main">
               <a:ext uri="{FF2B5EF4-FFF2-40B4-BE49-F238E27FC236}">
-                <a16:creationId xmlns:a16="http://schemas.microsoft.com/office/drawing/2014/main" id="{787CE2CC-CD7F-42EA-B17B-3ABCB0FE3259}"/>
+                <a16:creationId xmlns:a16="http://schemas.microsoft.com/office/drawing/2014/main" id="{D1688596-86E3-4CA0-A120-12E97DE53609}"/>
               </a:ext>
             </a:extLst>
           </p:cNvPr>
@@ -10355,7 +10363,7 @@
           <p:cNvPr id="8" name="">
             <a:extLst xmlns:a="http://schemas.openxmlformats.org/drawingml/2006/main">
               <a:ext uri="{FF2B5EF4-FFF2-40B4-BE49-F238E27FC236}">
-                <a16:creationId xmlns:a16="http://schemas.microsoft.com/office/drawing/2014/main" id="{4B33FDBD-6DB0-460A-B123-F37C79D66A18}"/>
+                <a16:creationId xmlns:a16="http://schemas.microsoft.com/office/drawing/2014/main" id="{8A9FE204-268C-41D0-988E-E9515A609044}"/>
               </a:ext>
             </a:extLst>
           </p:cNvPr>
@@ -10412,7 +10420,7 @@
           <p:cNvPr id="9" name="">
             <a:extLst xmlns:a="http://schemas.openxmlformats.org/drawingml/2006/main">
               <a:ext uri="{FF2B5EF4-FFF2-40B4-BE49-F238E27FC236}">
-                <a16:creationId xmlns:a16="http://schemas.microsoft.com/office/drawing/2014/main" id="{4CEF4CDD-8058-4782-8C5E-827EB3FDBE3F}"/>
+                <a16:creationId xmlns:a16="http://schemas.microsoft.com/office/drawing/2014/main" id="{991134A1-69D0-48B0-BB99-0220035F453F}"/>
               </a:ext>
             </a:extLst>
           </p:cNvPr>
@@ -10469,7 +10477,7 @@
           <p:cNvPr id="10" name="">
             <a:extLst xmlns:a="http://schemas.openxmlformats.org/drawingml/2006/main">
               <a:ext uri="{FF2B5EF4-FFF2-40B4-BE49-F238E27FC236}">
-                <a16:creationId xmlns:a16="http://schemas.microsoft.com/office/drawing/2014/main" id="{73719B4E-5A12-45A0-86F3-CCCD74DFB415}"/>
+                <a16:creationId xmlns:a16="http://schemas.microsoft.com/office/drawing/2014/main" id="{998382D2-75D2-4809-B9F6-97D6E8431E3B}"/>
               </a:ext>
             </a:extLst>
           </p:cNvPr>
@@ -10526,7 +10534,7 @@
           <p:cNvPr id="11" name="">
             <a:extLst xmlns:a="http://schemas.openxmlformats.org/drawingml/2006/main">
               <a:ext uri="{FF2B5EF4-FFF2-40B4-BE49-F238E27FC236}">
-                <a16:creationId xmlns:a16="http://schemas.microsoft.com/office/drawing/2014/main" id="{9169A87D-D99C-44ED-A1A9-A3435CAD9AF8}"/>
+                <a16:creationId xmlns:a16="http://schemas.microsoft.com/office/drawing/2014/main" id="{2901B4F6-3A73-4A56-B1C3-015CF544B472}"/>
               </a:ext>
             </a:extLst>
           </p:cNvPr>
@@ -10583,7 +10591,7 @@
           <p:cNvPr id="12" name="">
             <a:extLst xmlns:a="http://schemas.openxmlformats.org/drawingml/2006/main">
               <a:ext uri="{FF2B5EF4-FFF2-40B4-BE49-F238E27FC236}">
-                <a16:creationId xmlns:a16="http://schemas.microsoft.com/office/drawing/2014/main" id="{E05E55D5-0729-480C-A811-528E6C526747}"/>
+                <a16:creationId xmlns:a16="http://schemas.microsoft.com/office/drawing/2014/main" id="{9A4DF4B1-33E1-448A-ACEB-27B29D598A15}"/>
               </a:ext>
             </a:extLst>
           </p:cNvPr>
@@ -10640,7 +10648,7 @@
           <p:cNvPr id="13" name="">
             <a:extLst xmlns:a="http://schemas.openxmlformats.org/drawingml/2006/main">
               <a:ext uri="{FF2B5EF4-FFF2-40B4-BE49-F238E27FC236}">
-                <a16:creationId xmlns:a16="http://schemas.microsoft.com/office/drawing/2014/main" id="{F72448CF-7CB8-4B9C-8744-DD8FF99B63C8}"/>
+                <a16:creationId xmlns:a16="http://schemas.microsoft.com/office/drawing/2014/main" id="{43D8EC1A-695B-4E47-BFCB-B2C184096EFD}"/>
               </a:ext>
             </a:extLst>
           </p:cNvPr>
@@ -10697,7 +10705,7 @@
           <p:cNvPr id="14" name="">
             <a:extLst xmlns:a="http://schemas.openxmlformats.org/drawingml/2006/main">
               <a:ext uri="{FF2B5EF4-FFF2-40B4-BE49-F238E27FC236}">
-                <a16:creationId xmlns:a16="http://schemas.microsoft.com/office/drawing/2014/main" id="{28BDB3C1-38ED-4C19-9B7F-163555A00815}"/>
+                <a16:creationId xmlns:a16="http://schemas.microsoft.com/office/drawing/2014/main" id="{34C670DC-5AE8-4A18-BF1E-F64E84162E4D}"/>
               </a:ext>
             </a:extLst>
           </p:cNvPr>
@@ -10754,7 +10762,7 @@
           <p:cNvPr id="15" name="">
             <a:extLst xmlns:a="http://schemas.openxmlformats.org/drawingml/2006/main">
               <a:ext uri="{FF2B5EF4-FFF2-40B4-BE49-F238E27FC236}">
-                <a16:creationId xmlns:a16="http://schemas.microsoft.com/office/drawing/2014/main" id="{F15BBD49-521F-43D5-9A0E-B13296EA74E6}"/>
+                <a16:creationId xmlns:a16="http://schemas.microsoft.com/office/drawing/2014/main" id="{AAF3E475-8D57-4135-B363-31F4FC3045CF}"/>
               </a:ext>
             </a:extLst>
           </p:cNvPr>
@@ -10809,7 +10817,7 @@
     </p:spTree>
     <p:extLst>
       <p:ext uri="{BB962C8B-B14F-4D97-AF65-F5344CB8AC3E}">
-        <p14:creationId xmlns:p14="http://schemas.microsoft.com/office/powerpoint/2010/main" val="293891634"/>
+        <p14:creationId xmlns:p14="http://schemas.microsoft.com/office/powerpoint/2010/main" val="469955272"/>
       </p:ext>
     </p:extLst>
   </p:cSld>
@@ -10964,7 +10972,7 @@
           <p:cNvPr id="16" name="">
             <a:extLst xmlns:a="http://schemas.openxmlformats.org/drawingml/2006/main">
               <a:ext uri="{FF2B5EF4-FFF2-40B4-BE49-F238E27FC236}">
-                <a16:creationId xmlns:a16="http://schemas.microsoft.com/office/drawing/2014/main" id="{14B04457-1955-447E-BA45-1671F9CF6EAD}"/>
+                <a16:creationId xmlns:a16="http://schemas.microsoft.com/office/drawing/2014/main" id="{7DDDC196-25B2-44AB-B867-E0BC69534278}"/>
               </a:ext>
             </a:extLst>
           </p:cNvPr>
@@ -10996,7 +11004,7 @@
           <p:cNvPr id="2" name="">
             <a:extLst xmlns:a="http://schemas.openxmlformats.org/drawingml/2006/main">
               <a:ext uri="{FF2B5EF4-FFF2-40B4-BE49-F238E27FC236}">
-                <a16:creationId xmlns:a16="http://schemas.microsoft.com/office/drawing/2014/main" id="{B741AA56-336B-4E3C-9FB2-E50DCEF9BFD9}"/>
+                <a16:creationId xmlns:a16="http://schemas.microsoft.com/office/drawing/2014/main" id="{B34896BE-B66A-498E-A2E2-3C9C46B92E19}"/>
               </a:ext>
             </a:extLst>
           </p:cNvPr>
@@ -11053,7 +11061,7 @@
           <p:cNvPr id="3" name="">
             <a:extLst xmlns:a="http://schemas.openxmlformats.org/drawingml/2006/main">
               <a:ext uri="{FF2B5EF4-FFF2-40B4-BE49-F238E27FC236}">
-                <a16:creationId xmlns:a16="http://schemas.microsoft.com/office/drawing/2014/main" id="{91C9CB1F-457E-4E15-A7C6-DC706006CE43}"/>
+                <a16:creationId xmlns:a16="http://schemas.microsoft.com/office/drawing/2014/main" id="{6FF142FF-8897-439C-B2F1-DEDA8A33BF5D}"/>
               </a:ext>
             </a:extLst>
           </p:cNvPr>
@@ -11085,7 +11093,7 @@
           <p:cNvPr id="4" name="">
             <a:extLst xmlns:a="http://schemas.openxmlformats.org/drawingml/2006/main">
               <a:ext uri="{FF2B5EF4-FFF2-40B4-BE49-F238E27FC236}">
-                <a16:creationId xmlns:a16="http://schemas.microsoft.com/office/drawing/2014/main" id="{9E488568-E608-4224-917D-DA33AFF09A6B}"/>
+                <a16:creationId xmlns:a16="http://schemas.microsoft.com/office/drawing/2014/main" id="{E4921D81-1926-498F-A20E-A993E254A022}"/>
               </a:ext>
             </a:extLst>
           </p:cNvPr>
@@ -11142,7 +11150,7 @@
           <p:cNvPr id="5" name="">
             <a:extLst xmlns:a="http://schemas.openxmlformats.org/drawingml/2006/main">
               <a:ext uri="{FF2B5EF4-FFF2-40B4-BE49-F238E27FC236}">
-                <a16:creationId xmlns:a16="http://schemas.microsoft.com/office/drawing/2014/main" id="{D8AD45B7-E28B-4BCC-8BC7-AD0039C26C1A}"/>
+                <a16:creationId xmlns:a16="http://schemas.microsoft.com/office/drawing/2014/main" id="{0E5D6F4E-F3A9-4FA6-88D8-1734371A1E93}"/>
               </a:ext>
             </a:extLst>
           </p:cNvPr>
@@ -11199,7 +11207,7 @@
           <p:cNvPr id="6" name="">
             <a:extLst xmlns:a="http://schemas.openxmlformats.org/drawingml/2006/main">
               <a:ext uri="{FF2B5EF4-FFF2-40B4-BE49-F238E27FC236}">
-                <a16:creationId xmlns:a16="http://schemas.microsoft.com/office/drawing/2014/main" id="{176596BF-CEE1-4F4C-A31A-F11E5506AC12}"/>
+                <a16:creationId xmlns:a16="http://schemas.microsoft.com/office/drawing/2014/main" id="{6C205E16-542C-45FF-83ED-B1281AB1190C}"/>
               </a:ext>
             </a:extLst>
           </p:cNvPr>
@@ -11256,7 +11264,7 @@
           <p:cNvPr id="7" name="">
             <a:extLst xmlns:a="http://schemas.openxmlformats.org/drawingml/2006/main">
               <a:ext uri="{FF2B5EF4-FFF2-40B4-BE49-F238E27FC236}">
-                <a16:creationId xmlns:a16="http://schemas.microsoft.com/office/drawing/2014/main" id="{06B2513A-9A2C-4CB7-98B2-8672A48678AA}"/>
+                <a16:creationId xmlns:a16="http://schemas.microsoft.com/office/drawing/2014/main" id="{0F3C462D-12EF-446D-88E5-6D5C791DD2DB}"/>
               </a:ext>
             </a:extLst>
           </p:cNvPr>
@@ -11288,7 +11296,7 @@
           <p:cNvPr id="8" name="">
             <a:extLst xmlns:a="http://schemas.openxmlformats.org/drawingml/2006/main">
               <a:ext uri="{FF2B5EF4-FFF2-40B4-BE49-F238E27FC236}">
-                <a16:creationId xmlns:a16="http://schemas.microsoft.com/office/drawing/2014/main" id="{7A4E45E2-3465-4AFC-8B26-9D3E2CDDC596}"/>
+                <a16:creationId xmlns:a16="http://schemas.microsoft.com/office/drawing/2014/main" id="{8D3DDD9F-932A-40B5-9946-1A404B9EE9C4}"/>
               </a:ext>
             </a:extLst>
           </p:cNvPr>
@@ -11345,7 +11353,7 @@
           <p:cNvPr id="9" name="">
             <a:extLst xmlns:a="http://schemas.openxmlformats.org/drawingml/2006/main">
               <a:ext uri="{FF2B5EF4-FFF2-40B4-BE49-F238E27FC236}">
-                <a16:creationId xmlns:a16="http://schemas.microsoft.com/office/drawing/2014/main" id="{AE68C826-F95E-41F2-AC07-53857DB465E0}"/>
+                <a16:creationId xmlns:a16="http://schemas.microsoft.com/office/drawing/2014/main" id="{C2571F1E-65AE-407C-ADE3-F6815CAD3C57}"/>
               </a:ext>
             </a:extLst>
           </p:cNvPr>
@@ -11406,7 +11414,7 @@
           <p:nvPr/>
         </p:nvPicPr>
         <p:blipFill>
-          <a:blip xmlns:r="http://schemas.openxmlformats.org/officeDocument/2006/relationships" xmlns:a="http://schemas.openxmlformats.org/drawingml/2006/main" r:embed="Rd87449a4f8e848df"/>
+          <a:blip xmlns:r="http://schemas.openxmlformats.org/officeDocument/2006/relationships" xmlns:a="http://schemas.openxmlformats.org/drawingml/2006/main" r:embed="Rd4c2ab84bb474fcf"/>
           <a:stretch xmlns:a="http://schemas.openxmlformats.org/drawingml/2006/main"/>
         </p:blipFill>
         <p:spPr>
@@ -11424,7 +11432,7 @@
           <p:cNvPr id="11" name="">
             <a:extLst xmlns:a="http://schemas.openxmlformats.org/drawingml/2006/main">
               <a:ext uri="{FF2B5EF4-FFF2-40B4-BE49-F238E27FC236}">
-                <a16:creationId xmlns:a16="http://schemas.microsoft.com/office/drawing/2014/main" id="{700AD818-E2BC-4A73-8726-982354A0A2D2}"/>
+                <a16:creationId xmlns:a16="http://schemas.microsoft.com/office/drawing/2014/main" id="{F5DBDF25-ED37-407C-98BB-102DEB860EB9}"/>
               </a:ext>
             </a:extLst>
           </p:cNvPr>
@@ -11481,7 +11489,7 @@
           <p:cNvPr id="12" name="">
             <a:extLst xmlns:a="http://schemas.openxmlformats.org/drawingml/2006/main">
               <a:ext uri="{FF2B5EF4-FFF2-40B4-BE49-F238E27FC236}">
-                <a16:creationId xmlns:a16="http://schemas.microsoft.com/office/drawing/2014/main" id="{84A3FC80-C177-4BB7-95CF-FB5A05AC5178}"/>
+                <a16:creationId xmlns:a16="http://schemas.microsoft.com/office/drawing/2014/main" id="{4FC524C3-8B72-465A-A448-5D8F66754673}"/>
               </a:ext>
             </a:extLst>
           </p:cNvPr>
@@ -11538,7 +11546,7 @@
           <p:cNvPr id="13" name="">
             <a:extLst xmlns:a="http://schemas.openxmlformats.org/drawingml/2006/main">
               <a:ext uri="{FF2B5EF4-FFF2-40B4-BE49-F238E27FC236}">
-                <a16:creationId xmlns:a16="http://schemas.microsoft.com/office/drawing/2014/main" id="{28408EE4-0AC0-4089-A64E-920406D600F3}"/>
+                <a16:creationId xmlns:a16="http://schemas.microsoft.com/office/drawing/2014/main" id="{5EA646E2-C0CD-40C3-A8E5-D35AE52C2255}"/>
               </a:ext>
             </a:extLst>
           </p:cNvPr>
@@ -11570,7 +11578,7 @@
           <p:cNvPr id="14" name="">
             <a:extLst xmlns:a="http://schemas.openxmlformats.org/drawingml/2006/main">
               <a:ext uri="{FF2B5EF4-FFF2-40B4-BE49-F238E27FC236}">
-                <a16:creationId xmlns:a16="http://schemas.microsoft.com/office/drawing/2014/main" id="{A62ADE76-E63F-44DB-9EF6-C8E0D67D4967}"/>
+                <a16:creationId xmlns:a16="http://schemas.microsoft.com/office/drawing/2014/main" id="{D856D9D3-9849-41F4-9A53-4FBAC9576AEA}"/>
               </a:ext>
             </a:extLst>
           </p:cNvPr>
@@ -11627,7 +11635,7 @@
           <p:cNvPr id="15" name="">
             <a:extLst xmlns:a="http://schemas.openxmlformats.org/drawingml/2006/main">
               <a:ext uri="{FF2B5EF4-FFF2-40B4-BE49-F238E27FC236}">
-                <a16:creationId xmlns:a16="http://schemas.microsoft.com/office/drawing/2014/main" id="{44B0890F-E9F6-4C4D-A979-6A7F6D496C02}"/>
+                <a16:creationId xmlns:a16="http://schemas.microsoft.com/office/drawing/2014/main" id="{74F10C2C-F998-4C66-84B1-54002552F806}"/>
               </a:ext>
             </a:extLst>
           </p:cNvPr>
@@ -11682,7 +11690,7 @@
     </p:spTree>
     <p:extLst>
       <p:ext uri="{BB962C8B-B14F-4D97-AF65-F5344CB8AC3E}">
-        <p14:creationId xmlns:p14="http://schemas.microsoft.com/office/powerpoint/2010/main" val="851664496"/>
+        <p14:creationId xmlns:p14="http://schemas.microsoft.com/office/powerpoint/2010/main" val="398730013"/>
       </p:ext>
     </p:extLst>
   </p:cSld>
@@ -11837,7 +11845,7 @@
           <p:cNvPr id="23" name="">
             <a:extLst xmlns:a="http://schemas.openxmlformats.org/drawingml/2006/main">
               <a:ext uri="{FF2B5EF4-FFF2-40B4-BE49-F238E27FC236}">
-                <a16:creationId xmlns:a16="http://schemas.microsoft.com/office/drawing/2014/main" id="{82C837F3-9D7F-485C-BCC6-A37AB6C82D95}"/>
+                <a16:creationId xmlns:a16="http://schemas.microsoft.com/office/drawing/2014/main" id="{FFD3BFA1-04E6-446E-A1DE-223E5ACF7904}"/>
               </a:ext>
             </a:extLst>
           </p:cNvPr>
@@ -11869,7 +11877,7 @@
           <p:cNvPr id="2" name="">
             <a:extLst xmlns:a="http://schemas.openxmlformats.org/drawingml/2006/main">
               <a:ext uri="{FF2B5EF4-FFF2-40B4-BE49-F238E27FC236}">
-                <a16:creationId xmlns:a16="http://schemas.microsoft.com/office/drawing/2014/main" id="{B0B44472-DE43-495C-BC7E-605784D4F234}"/>
+                <a16:creationId xmlns:a16="http://schemas.microsoft.com/office/drawing/2014/main" id="{1D285DE8-BB85-4C17-B255-6CFFAC224F7B}"/>
               </a:ext>
             </a:extLst>
           </p:cNvPr>
@@ -11926,7 +11934,7 @@
           <p:cNvPr id="3" name="">
             <a:extLst xmlns:a="http://schemas.openxmlformats.org/drawingml/2006/main">
               <a:ext uri="{FF2B5EF4-FFF2-40B4-BE49-F238E27FC236}">
-                <a16:creationId xmlns:a16="http://schemas.microsoft.com/office/drawing/2014/main" id="{5725D5A2-DB1E-4DE3-8C02-F044A2DAFD20}"/>
+                <a16:creationId xmlns:a16="http://schemas.microsoft.com/office/drawing/2014/main" id="{5186437E-43D0-4C8C-A45C-029E396E2D59}"/>
               </a:ext>
             </a:extLst>
           </p:cNvPr>
@@ -11958,7 +11966,7 @@
           <p:cNvPr id="4" name="">
             <a:extLst xmlns:a="http://schemas.openxmlformats.org/drawingml/2006/main">
               <a:ext uri="{FF2B5EF4-FFF2-40B4-BE49-F238E27FC236}">
-                <a16:creationId xmlns:a16="http://schemas.microsoft.com/office/drawing/2014/main" id="{708C3C73-7C9F-4A52-A338-39CBB2319088}"/>
+                <a16:creationId xmlns:a16="http://schemas.microsoft.com/office/drawing/2014/main" id="{80403281-1E9A-4845-941A-ED09FFAB167B}"/>
               </a:ext>
             </a:extLst>
           </p:cNvPr>
@@ -12015,7 +12023,7 @@
           <p:cNvPr id="5" name="">
             <a:extLst xmlns:a="http://schemas.openxmlformats.org/drawingml/2006/main">
               <a:ext uri="{FF2B5EF4-FFF2-40B4-BE49-F238E27FC236}">
-                <a16:creationId xmlns:a16="http://schemas.microsoft.com/office/drawing/2014/main" id="{E03D01A4-9776-49A7-A0A3-8474AE70C211}"/>
+                <a16:creationId xmlns:a16="http://schemas.microsoft.com/office/drawing/2014/main" id="{DC6E93A4-D52C-4FC2-912C-00BD5CA14D54}"/>
               </a:ext>
             </a:extLst>
           </p:cNvPr>
@@ -12072,7 +12080,7 @@
           <p:cNvPr id="6" name="">
             <a:extLst xmlns:a="http://schemas.openxmlformats.org/drawingml/2006/main">
               <a:ext uri="{FF2B5EF4-FFF2-40B4-BE49-F238E27FC236}">
-                <a16:creationId xmlns:a16="http://schemas.microsoft.com/office/drawing/2014/main" id="{DAAB7D71-0558-4534-A8A7-1582715371EF}"/>
+                <a16:creationId xmlns:a16="http://schemas.microsoft.com/office/drawing/2014/main" id="{78ED8539-BA63-4E34-BC6E-491215D961C0}"/>
               </a:ext>
             </a:extLst>
           </p:cNvPr>
@@ -12129,7 +12137,7 @@
           <p:cNvPr id="7" name="">
             <a:extLst xmlns:a="http://schemas.openxmlformats.org/drawingml/2006/main">
               <a:ext uri="{FF2B5EF4-FFF2-40B4-BE49-F238E27FC236}">
-                <a16:creationId xmlns:a16="http://schemas.microsoft.com/office/drawing/2014/main" id="{062CA87C-729D-4087-B60A-6CD581C9E719}"/>
+                <a16:creationId xmlns:a16="http://schemas.microsoft.com/office/drawing/2014/main" id="{4AA5E065-2555-4AB5-9B51-E50BAF451599}"/>
               </a:ext>
             </a:extLst>
           </p:cNvPr>
@@ -12161,7 +12169,7 @@
           <p:cNvPr id="8" name="">
             <a:extLst xmlns:a="http://schemas.openxmlformats.org/drawingml/2006/main">
               <a:ext uri="{FF2B5EF4-FFF2-40B4-BE49-F238E27FC236}">
-                <a16:creationId xmlns:a16="http://schemas.microsoft.com/office/drawing/2014/main" id="{4191894E-3C20-4367-B9CF-722D3B01EF43}"/>
+                <a16:creationId xmlns:a16="http://schemas.microsoft.com/office/drawing/2014/main" id="{DFE7E8D3-5802-449B-90A7-3D541F860637}"/>
               </a:ext>
             </a:extLst>
           </p:cNvPr>
@@ -12218,7 +12226,7 @@
           <p:cNvPr id="9" name="">
             <a:extLst xmlns:a="http://schemas.openxmlformats.org/drawingml/2006/main">
               <a:ext uri="{FF2B5EF4-FFF2-40B4-BE49-F238E27FC236}">
-                <a16:creationId xmlns:a16="http://schemas.microsoft.com/office/drawing/2014/main" id="{4B9A805B-E303-448F-BD28-E6E1360D1127}"/>
+                <a16:creationId xmlns:a16="http://schemas.microsoft.com/office/drawing/2014/main" id="{C7CF9C44-F408-4C53-975F-70CA5CE72F57}"/>
               </a:ext>
             </a:extLst>
           </p:cNvPr>
@@ -12275,7 +12283,7 @@
           <p:cNvPr id="10" name="">
             <a:extLst xmlns:a="http://schemas.openxmlformats.org/drawingml/2006/main">
               <a:ext uri="{FF2B5EF4-FFF2-40B4-BE49-F238E27FC236}">
-                <a16:creationId xmlns:a16="http://schemas.microsoft.com/office/drawing/2014/main" id="{7DC569ED-AE81-429B-B30C-E1AB17EB3061}"/>
+                <a16:creationId xmlns:a16="http://schemas.microsoft.com/office/drawing/2014/main" id="{D6713EB3-B38A-4EBA-B13A-4569C5BA1143}"/>
               </a:ext>
             </a:extLst>
           </p:cNvPr>
@@ -12309,7 +12317,7 @@
           <p:cNvPr id="11" name="">
             <a:extLst xmlns:a="http://schemas.openxmlformats.org/drawingml/2006/main">
               <a:ext uri="{FF2B5EF4-FFF2-40B4-BE49-F238E27FC236}">
-                <a16:creationId xmlns:a16="http://schemas.microsoft.com/office/drawing/2014/main" id="{0C3EACF7-F92B-4AF2-967D-0E7A1F2B8C02}"/>
+                <a16:creationId xmlns:a16="http://schemas.microsoft.com/office/drawing/2014/main" id="{9FAA894F-42DE-40A9-9AE4-7556F238E5C2}"/>
               </a:ext>
             </a:extLst>
           </p:cNvPr>
@@ -12341,7 +12349,7 @@
           <p:cNvPr id="12" name="">
             <a:extLst xmlns:a="http://schemas.openxmlformats.org/drawingml/2006/main">
               <a:ext uri="{FF2B5EF4-FFF2-40B4-BE49-F238E27FC236}">
-                <a16:creationId xmlns:a16="http://schemas.microsoft.com/office/drawing/2014/main" id="{4EC5A3D3-7299-492E-8610-B32921DBE19E}"/>
+                <a16:creationId xmlns:a16="http://schemas.microsoft.com/office/drawing/2014/main" id="{421ED0BB-B718-4707-B732-4A65D11A5C1C}"/>
               </a:ext>
             </a:extLst>
           </p:cNvPr>
@@ -12398,7 +12406,7 @@
           <p:cNvPr id="13" name="">
             <a:extLst xmlns:a="http://schemas.openxmlformats.org/drawingml/2006/main">
               <a:ext uri="{FF2B5EF4-FFF2-40B4-BE49-F238E27FC236}">
-                <a16:creationId xmlns:a16="http://schemas.microsoft.com/office/drawing/2014/main" id="{C937BC22-6BF1-4E53-B7A2-DD5FF3FC4619}"/>
+                <a16:creationId xmlns:a16="http://schemas.microsoft.com/office/drawing/2014/main" id="{66E15900-FF5A-4026-A2BF-08321073F1A0}"/>
               </a:ext>
             </a:extLst>
           </p:cNvPr>
@@ -12455,7 +12463,7 @@
           <p:cNvPr id="14" name="">
             <a:extLst xmlns:a="http://schemas.openxmlformats.org/drawingml/2006/main">
               <a:ext uri="{FF2B5EF4-FFF2-40B4-BE49-F238E27FC236}">
-                <a16:creationId xmlns:a16="http://schemas.microsoft.com/office/drawing/2014/main" id="{323C2C3F-B3B7-49CA-88E2-8CCF0F56ACC5}"/>
+                <a16:creationId xmlns:a16="http://schemas.microsoft.com/office/drawing/2014/main" id="{5390FB6C-C50E-44E6-8A51-F8D8E60D7275}"/>
               </a:ext>
             </a:extLst>
           </p:cNvPr>
@@ -12489,7 +12497,7 @@
           <p:cNvPr id="15" name="">
             <a:extLst xmlns:a="http://schemas.openxmlformats.org/drawingml/2006/main">
               <a:ext uri="{FF2B5EF4-FFF2-40B4-BE49-F238E27FC236}">
-                <a16:creationId xmlns:a16="http://schemas.microsoft.com/office/drawing/2014/main" id="{65293963-F955-4A1C-8038-EA745313A64C}"/>
+                <a16:creationId xmlns:a16="http://schemas.microsoft.com/office/drawing/2014/main" id="{CC948BE8-A511-46CA-B84B-F21CE797ED47}"/>
               </a:ext>
             </a:extLst>
           </p:cNvPr>
@@ -12521,7 +12529,7 @@
           <p:cNvPr id="16" name="">
             <a:extLst xmlns:a="http://schemas.openxmlformats.org/drawingml/2006/main">
               <a:ext uri="{FF2B5EF4-FFF2-40B4-BE49-F238E27FC236}">
-                <a16:creationId xmlns:a16="http://schemas.microsoft.com/office/drawing/2014/main" id="{69DEEDBA-2E2A-4990-A76E-B390C87ED945}"/>
+                <a16:creationId xmlns:a16="http://schemas.microsoft.com/office/drawing/2014/main" id="{7215225F-913E-403E-9737-9AE8433E4598}"/>
               </a:ext>
             </a:extLst>
           </p:cNvPr>
@@ -12578,7 +12586,7 @@
           <p:cNvPr id="17" name="">
             <a:extLst xmlns:a="http://schemas.openxmlformats.org/drawingml/2006/main">
               <a:ext uri="{FF2B5EF4-FFF2-40B4-BE49-F238E27FC236}">
-                <a16:creationId xmlns:a16="http://schemas.microsoft.com/office/drawing/2014/main" id="{D2BAF0CB-4D5F-4EFB-B602-ABD44DAD4C8C}"/>
+                <a16:creationId xmlns:a16="http://schemas.microsoft.com/office/drawing/2014/main" id="{A31C323E-4696-498B-AB83-07DA77AF338E}"/>
               </a:ext>
             </a:extLst>
           </p:cNvPr>
@@ -12635,7 +12643,7 @@
           <p:cNvPr id="18" name="">
             <a:extLst xmlns:a="http://schemas.openxmlformats.org/drawingml/2006/main">
               <a:ext uri="{FF2B5EF4-FFF2-40B4-BE49-F238E27FC236}">
-                <a16:creationId xmlns:a16="http://schemas.microsoft.com/office/drawing/2014/main" id="{F9084199-20DB-40CF-B031-66BFE70EADC6}"/>
+                <a16:creationId xmlns:a16="http://schemas.microsoft.com/office/drawing/2014/main" id="{B23486C5-BF84-4447-BD59-BE28156C2218}"/>
               </a:ext>
             </a:extLst>
           </p:cNvPr>
@@ -12669,7 +12677,7 @@
           <p:cNvPr id="19" name="">
             <a:extLst xmlns:a="http://schemas.openxmlformats.org/drawingml/2006/main">
               <a:ext uri="{FF2B5EF4-FFF2-40B4-BE49-F238E27FC236}">
-                <a16:creationId xmlns:a16="http://schemas.microsoft.com/office/drawing/2014/main" id="{CFE9522A-E4F5-4445-90F0-F0AEE984DEE8}"/>
+                <a16:creationId xmlns:a16="http://schemas.microsoft.com/office/drawing/2014/main" id="{3492BC50-13B6-4A80-BE26-C9E3804AF99E}"/>
               </a:ext>
             </a:extLst>
           </p:cNvPr>
@@ -12701,7 +12709,7 @@
           <p:cNvPr id="20" name="">
             <a:extLst xmlns:a="http://schemas.openxmlformats.org/drawingml/2006/main">
               <a:ext uri="{FF2B5EF4-FFF2-40B4-BE49-F238E27FC236}">
-                <a16:creationId xmlns:a16="http://schemas.microsoft.com/office/drawing/2014/main" id="{6F8721E8-B366-4D8B-9D6A-A17F44589CE2}"/>
+                <a16:creationId xmlns:a16="http://schemas.microsoft.com/office/drawing/2014/main" id="{09768A4E-B625-409A-9FB3-FB6F013574F2}"/>
               </a:ext>
             </a:extLst>
           </p:cNvPr>
@@ -12758,7 +12766,7 @@
           <p:cNvPr id="21" name="">
             <a:extLst xmlns:a="http://schemas.openxmlformats.org/drawingml/2006/main">
               <a:ext uri="{FF2B5EF4-FFF2-40B4-BE49-F238E27FC236}">
-                <a16:creationId xmlns:a16="http://schemas.microsoft.com/office/drawing/2014/main" id="{5E422AE0-2C82-4BAC-BF69-97A639E1C1E3}"/>
+                <a16:creationId xmlns:a16="http://schemas.microsoft.com/office/drawing/2014/main" id="{B049A93C-0F2D-4FC6-9E26-6DDD1A613799}"/>
               </a:ext>
             </a:extLst>
           </p:cNvPr>
@@ -12815,7 +12823,7 @@
           <p:cNvPr id="22" name="">
             <a:extLst xmlns:a="http://schemas.openxmlformats.org/drawingml/2006/main">
               <a:ext uri="{FF2B5EF4-FFF2-40B4-BE49-F238E27FC236}">
-                <a16:creationId xmlns:a16="http://schemas.microsoft.com/office/drawing/2014/main" id="{3E32F6AF-11D9-48AC-A583-5A348792F35F}"/>
+                <a16:creationId xmlns:a16="http://schemas.microsoft.com/office/drawing/2014/main" id="{05A59D70-F70C-4128-9351-9EE1BB5754B3}"/>
               </a:ext>
             </a:extLst>
           </p:cNvPr>
@@ -12870,7 +12878,7 @@
     </p:spTree>
     <p:extLst>
       <p:ext uri="{BB962C8B-B14F-4D97-AF65-F5344CB8AC3E}">
-        <p14:creationId xmlns:p14="http://schemas.microsoft.com/office/powerpoint/2010/main" val="2120104121"/>
+        <p14:creationId xmlns:p14="http://schemas.microsoft.com/office/powerpoint/2010/main" val="1450372026"/>
       </p:ext>
     </p:extLst>
   </p:cSld>
@@ -13071,7 +13079,7 @@
           <p:cNvPr id="22" name="">
             <a:extLst xmlns:a="http://schemas.openxmlformats.org/drawingml/2006/main">
               <a:ext uri="{FF2B5EF4-FFF2-40B4-BE49-F238E27FC236}">
-                <a16:creationId xmlns:a16="http://schemas.microsoft.com/office/drawing/2014/main" id="{AFE078AD-4707-4369-A6DC-919389E7D1AB}"/>
+                <a16:creationId xmlns:a16="http://schemas.microsoft.com/office/drawing/2014/main" id="{665205DC-8B68-4B58-88C3-76A442DEEAE1}"/>
               </a:ext>
             </a:extLst>
           </p:cNvPr>
@@ -13103,7 +13111,7 @@
           <p:cNvPr id="2" name="">
             <a:extLst xmlns:a="http://schemas.openxmlformats.org/drawingml/2006/main">
               <a:ext uri="{FF2B5EF4-FFF2-40B4-BE49-F238E27FC236}">
-                <a16:creationId xmlns:a16="http://schemas.microsoft.com/office/drawing/2014/main" id="{63C768A0-327F-4AE6-B590-F2BA28EAA5A9}"/>
+                <a16:creationId xmlns:a16="http://schemas.microsoft.com/office/drawing/2014/main" id="{2D079D8C-C27C-420A-BDA6-17DD04109A4A}"/>
               </a:ext>
             </a:extLst>
           </p:cNvPr>
@@ -13160,7 +13168,7 @@
           <p:cNvPr id="3" name="">
             <a:extLst xmlns:a="http://schemas.openxmlformats.org/drawingml/2006/main">
               <a:ext uri="{FF2B5EF4-FFF2-40B4-BE49-F238E27FC236}">
-                <a16:creationId xmlns:a16="http://schemas.microsoft.com/office/drawing/2014/main" id="{CA13DAA5-B8E6-42E2-A800-371E519950B3}"/>
+                <a16:creationId xmlns:a16="http://schemas.microsoft.com/office/drawing/2014/main" id="{C8117CD1-1F22-4360-8A65-CD626B2B2D7B}"/>
               </a:ext>
             </a:extLst>
           </p:cNvPr>
@@ -13192,7 +13200,7 @@
           <p:cNvPr id="4" name="">
             <a:extLst xmlns:a="http://schemas.openxmlformats.org/drawingml/2006/main">
               <a:ext uri="{FF2B5EF4-FFF2-40B4-BE49-F238E27FC236}">
-                <a16:creationId xmlns:a16="http://schemas.microsoft.com/office/drawing/2014/main" id="{3EB6A7C5-991C-4F3B-9FBB-A0FB16BC10A1}"/>
+                <a16:creationId xmlns:a16="http://schemas.microsoft.com/office/drawing/2014/main" id="{07106A14-9B34-409F-B83D-3B07D778B256}"/>
               </a:ext>
             </a:extLst>
           </p:cNvPr>
@@ -13249,7 +13257,7 @@
           <p:cNvPr id="5" name="">
             <a:extLst xmlns:a="http://schemas.openxmlformats.org/drawingml/2006/main">
               <a:ext uri="{FF2B5EF4-FFF2-40B4-BE49-F238E27FC236}">
-                <a16:creationId xmlns:a16="http://schemas.microsoft.com/office/drawing/2014/main" id="{E8F93C74-C709-430F-BDC6-3FDA7965951A}"/>
+                <a16:creationId xmlns:a16="http://schemas.microsoft.com/office/drawing/2014/main" id="{EBEA1B73-E292-42D6-BA66-FB1124E8CCC5}"/>
               </a:ext>
             </a:extLst>
           </p:cNvPr>
@@ -13306,7 +13314,7 @@
           <p:cNvPr id="6" name="">
             <a:extLst xmlns:a="http://schemas.openxmlformats.org/drawingml/2006/main">
               <a:ext uri="{FF2B5EF4-FFF2-40B4-BE49-F238E27FC236}">
-                <a16:creationId xmlns:a16="http://schemas.microsoft.com/office/drawing/2014/main" id="{A6959B07-283D-4FF8-A3C1-F6FD94C22739}"/>
+                <a16:creationId xmlns:a16="http://schemas.microsoft.com/office/drawing/2014/main" id="{46C49D1F-54BD-45AE-97D9-32280C4F9642}"/>
               </a:ext>
             </a:extLst>
           </p:cNvPr>
@@ -13363,7 +13371,7 @@
           <p:cNvPr id="7" name="">
             <a:extLst xmlns:a="http://schemas.openxmlformats.org/drawingml/2006/main">
               <a:ext uri="{FF2B5EF4-FFF2-40B4-BE49-F238E27FC236}">
-                <a16:creationId xmlns:a16="http://schemas.microsoft.com/office/drawing/2014/main" id="{4C7285AD-E618-4FD6-9035-C823AFC936FC}"/>
+                <a16:creationId xmlns:a16="http://schemas.microsoft.com/office/drawing/2014/main" id="{EBE66192-E952-427F-9A5C-19EE80EBB1FD}"/>
               </a:ext>
             </a:extLst>
           </p:cNvPr>
@@ -13395,7 +13403,7 @@
           <p:cNvPr id="8" name="">
             <a:extLst xmlns:a="http://schemas.openxmlformats.org/drawingml/2006/main">
               <a:ext uri="{FF2B5EF4-FFF2-40B4-BE49-F238E27FC236}">
-                <a16:creationId xmlns:a16="http://schemas.microsoft.com/office/drawing/2014/main" id="{47B5B070-F500-41DA-A166-FC722FDB34DD}"/>
+                <a16:creationId xmlns:a16="http://schemas.microsoft.com/office/drawing/2014/main" id="{87B92B9D-6CAC-49B7-9A4C-B397C3C6B77E}"/>
               </a:ext>
             </a:extLst>
           </p:cNvPr>
@@ -13452,7 +13460,7 @@
           <p:cNvPr id="9" name="">
             <a:extLst xmlns:a="http://schemas.openxmlformats.org/drawingml/2006/main">
               <a:ext uri="{FF2B5EF4-FFF2-40B4-BE49-F238E27FC236}">
-                <a16:creationId xmlns:a16="http://schemas.microsoft.com/office/drawing/2014/main" id="{E6C5BA62-2949-4661-8967-36C8827BE7D7}"/>
+                <a16:creationId xmlns:a16="http://schemas.microsoft.com/office/drawing/2014/main" id="{DDD04DBF-6B21-4717-BE96-4E7E7C650A65}"/>
               </a:ext>
             </a:extLst>
           </p:cNvPr>
@@ -13509,7 +13517,7 @@
           <p:cNvPr id="10" name="">
             <a:extLst xmlns:a="http://schemas.openxmlformats.org/drawingml/2006/main">
               <a:ext uri="{FF2B5EF4-FFF2-40B4-BE49-F238E27FC236}">
-                <a16:creationId xmlns:a16="http://schemas.microsoft.com/office/drawing/2014/main" id="{C04FACA2-E88B-4903-A2C0-BC3826956417}"/>
+                <a16:creationId xmlns:a16="http://schemas.microsoft.com/office/drawing/2014/main" id="{D700CF63-2066-44B2-866C-56BC60A0AEB2}"/>
               </a:ext>
             </a:extLst>
           </p:cNvPr>
@@ -13543,7 +13551,7 @@
           <p:cNvPr id="11" name="">
             <a:extLst xmlns:a="http://schemas.openxmlformats.org/drawingml/2006/main">
               <a:ext uri="{FF2B5EF4-FFF2-40B4-BE49-F238E27FC236}">
-                <a16:creationId xmlns:a16="http://schemas.microsoft.com/office/drawing/2014/main" id="{DC2CEABD-C399-4CDF-A6AF-E01E0D2C8AAF}"/>
+                <a16:creationId xmlns:a16="http://schemas.microsoft.com/office/drawing/2014/main" id="{F2ECB212-68F6-48DB-B492-640B19D96F17}"/>
               </a:ext>
             </a:extLst>
           </p:cNvPr>
@@ -13575,7 +13583,7 @@
           <p:cNvPr id="12" name="">
             <a:extLst xmlns:a="http://schemas.openxmlformats.org/drawingml/2006/main">
               <a:ext uri="{FF2B5EF4-FFF2-40B4-BE49-F238E27FC236}">
-                <a16:creationId xmlns:a16="http://schemas.microsoft.com/office/drawing/2014/main" id="{1CD5D9F4-266C-4EEC-817F-A9D961CA8F74}"/>
+                <a16:creationId xmlns:a16="http://schemas.microsoft.com/office/drawing/2014/main" id="{A69CFD0A-A00C-40F9-8ADF-9A23EEE467AA}"/>
               </a:ext>
             </a:extLst>
           </p:cNvPr>
@@ -13632,7 +13640,7 @@
           <p:cNvPr id="13" name="">
             <a:extLst xmlns:a="http://schemas.openxmlformats.org/drawingml/2006/main">
               <a:ext uri="{FF2B5EF4-FFF2-40B4-BE49-F238E27FC236}">
-                <a16:creationId xmlns:a16="http://schemas.microsoft.com/office/drawing/2014/main" id="{40DFDDEA-DAFD-4FEB-BCA9-7E0E821E5EEB}"/>
+                <a16:creationId xmlns:a16="http://schemas.microsoft.com/office/drawing/2014/main" id="{F4738E42-5435-415E-8343-C2A493C60817}"/>
               </a:ext>
             </a:extLst>
           </p:cNvPr>
@@ -13689,7 +13697,7 @@
           <p:cNvPr id="14" name="">
             <a:extLst xmlns:a="http://schemas.openxmlformats.org/drawingml/2006/main">
               <a:ext uri="{FF2B5EF4-FFF2-40B4-BE49-F238E27FC236}">
-                <a16:creationId xmlns:a16="http://schemas.microsoft.com/office/drawing/2014/main" id="{9BE277BB-43F2-4C11-B8EC-0463DABF60F4}"/>
+                <a16:creationId xmlns:a16="http://schemas.microsoft.com/office/drawing/2014/main" id="{89153EDC-9470-4DF4-A640-0F04197F5019}"/>
               </a:ext>
             </a:extLst>
           </p:cNvPr>
@@ -13723,7 +13731,7 @@
           <p:cNvPr id="15" name="">
             <a:extLst xmlns:a="http://schemas.openxmlformats.org/drawingml/2006/main">
               <a:ext uri="{FF2B5EF4-FFF2-40B4-BE49-F238E27FC236}">
-                <a16:creationId xmlns:a16="http://schemas.microsoft.com/office/drawing/2014/main" id="{64D19CA1-ED30-4455-8146-8AF0AE709B89}"/>
+                <a16:creationId xmlns:a16="http://schemas.microsoft.com/office/drawing/2014/main" id="{B71D72A3-C3AC-4114-AB91-13F0852218E2}"/>
               </a:ext>
             </a:extLst>
           </p:cNvPr>
@@ -13755,7 +13763,7 @@
           <p:cNvPr id="16" name="">
             <a:extLst xmlns:a="http://schemas.openxmlformats.org/drawingml/2006/main">
               <a:ext uri="{FF2B5EF4-FFF2-40B4-BE49-F238E27FC236}">
-                <a16:creationId xmlns:a16="http://schemas.microsoft.com/office/drawing/2014/main" id="{B40BE5F1-4DFA-4718-A8DB-B8640CE2C77C}"/>
+                <a16:creationId xmlns:a16="http://schemas.microsoft.com/office/drawing/2014/main" id="{354E1CEC-0C17-47F2-A6C9-6DA182C1C1E5}"/>
               </a:ext>
             </a:extLst>
           </p:cNvPr>
@@ -13812,7 +13820,7 @@
           <p:cNvPr id="17" name="">
             <a:extLst xmlns:a="http://schemas.openxmlformats.org/drawingml/2006/main">
               <a:ext uri="{FF2B5EF4-FFF2-40B4-BE49-F238E27FC236}">
-                <a16:creationId xmlns:a16="http://schemas.microsoft.com/office/drawing/2014/main" id="{F198E0E2-FB54-4DDD-8D30-2FA306E12789}"/>
+                <a16:creationId xmlns:a16="http://schemas.microsoft.com/office/drawing/2014/main" id="{D9287382-EF1E-42F8-AE4F-6F00761635BF}"/>
               </a:ext>
             </a:extLst>
           </p:cNvPr>
@@ -13869,7 +13877,7 @@
           <p:cNvPr id="18" name="">
             <a:extLst xmlns:a="http://schemas.openxmlformats.org/drawingml/2006/main">
               <a:ext uri="{FF2B5EF4-FFF2-40B4-BE49-F238E27FC236}">
-                <a16:creationId xmlns:a16="http://schemas.microsoft.com/office/drawing/2014/main" id="{814A2275-3CD3-49CE-960B-12E088732AC2}"/>
+                <a16:creationId xmlns:a16="http://schemas.microsoft.com/office/drawing/2014/main" id="{6A5E1192-E1CC-423F-9079-7ADD9A54B42F}"/>
               </a:ext>
             </a:extLst>
           </p:cNvPr>
@@ -13903,7 +13911,7 @@
           <p:cNvPr id="19" name="">
             <a:extLst xmlns:a="http://schemas.openxmlformats.org/drawingml/2006/main">
               <a:ext uri="{FF2B5EF4-FFF2-40B4-BE49-F238E27FC236}">
-                <a16:creationId xmlns:a16="http://schemas.microsoft.com/office/drawing/2014/main" id="{A1E082BE-CEEF-441D-81A5-0D5CC9D88FAC}"/>
+                <a16:creationId xmlns:a16="http://schemas.microsoft.com/office/drawing/2014/main" id="{D27DDE33-8A61-4B13-AB20-9B89141F9996}"/>
               </a:ext>
             </a:extLst>
           </p:cNvPr>
@@ -13935,7 +13943,7 @@
           <p:cNvPr id="20" name="">
             <a:extLst xmlns:a="http://schemas.openxmlformats.org/drawingml/2006/main">
               <a:ext uri="{FF2B5EF4-FFF2-40B4-BE49-F238E27FC236}">
-                <a16:creationId xmlns:a16="http://schemas.microsoft.com/office/drawing/2014/main" id="{F5CE6482-EDC6-4E57-BB8D-D48B823A29A0}"/>
+                <a16:creationId xmlns:a16="http://schemas.microsoft.com/office/drawing/2014/main" id="{1D744827-E0D0-4488-965A-5A23A3FB8A53}"/>
               </a:ext>
             </a:extLst>
           </p:cNvPr>
@@ -13992,7 +14000,7 @@
           <p:cNvPr id="21" name="">
             <a:extLst xmlns:a="http://schemas.openxmlformats.org/drawingml/2006/main">
               <a:ext uri="{FF2B5EF4-FFF2-40B4-BE49-F238E27FC236}">
-                <a16:creationId xmlns:a16="http://schemas.microsoft.com/office/drawing/2014/main" id="{67D850F2-1C74-486F-A570-D524C6E2EAF3}"/>
+                <a16:creationId xmlns:a16="http://schemas.microsoft.com/office/drawing/2014/main" id="{E90D440B-8637-4458-B44D-3E0AF63D532E}"/>
               </a:ext>
             </a:extLst>
           </p:cNvPr>
@@ -14047,7 +14055,7 @@
     </p:spTree>
     <p:extLst>
       <p:ext uri="{BB962C8B-B14F-4D97-AF65-F5344CB8AC3E}">
-        <p14:creationId xmlns:p14="http://schemas.microsoft.com/office/powerpoint/2010/main" val="837665274"/>
+        <p14:creationId xmlns:p14="http://schemas.microsoft.com/office/powerpoint/2010/main" val="1590407742"/>
       </p:ext>
     </p:extLst>
   </p:cSld>
